--- a/p/pro/Ranjan-Sharma-Profile.pptx
+++ b/p/pro/Ranjan-Sharma-Profile.pptx
@@ -197,7 +197,7 @@
           <a:p>
             <a:fld id="{81255D54-DCC7-4AEA-9A0D-ADE65BFAD0FD}" type="datetimeFigureOut">
               <a:rPr lang="en-US" smtClean="0"/>
-              <a:t>9/12/2024</a:t>
+              <a:t>10/14/2024</a:t>
             </a:fld>
             <a:endParaRPr lang="en-US"/>
           </a:p>
@@ -695,7 +695,7 @@
           <a:p>
             <a:fld id="{92AA035B-E45D-4D8B-A5AD-8F56B5D9C378}" type="datetimeFigureOut">
               <a:rPr lang="en-US" smtClean="0"/>
-              <a:t>9/12/2024</a:t>
+              <a:t>10/14/2024</a:t>
             </a:fld>
             <a:endParaRPr lang="en-US"/>
           </a:p>
@@ -893,7 +893,7 @@
           <a:p>
             <a:fld id="{92AA035B-E45D-4D8B-A5AD-8F56B5D9C378}" type="datetimeFigureOut">
               <a:rPr lang="en-US" smtClean="0"/>
-              <a:t>9/12/2024</a:t>
+              <a:t>10/14/2024</a:t>
             </a:fld>
             <a:endParaRPr lang="en-US"/>
           </a:p>
@@ -1101,7 +1101,7 @@
           <a:p>
             <a:fld id="{92AA035B-E45D-4D8B-A5AD-8F56B5D9C378}" type="datetimeFigureOut">
               <a:rPr lang="en-US" smtClean="0"/>
-              <a:t>9/12/2024</a:t>
+              <a:t>10/14/2024</a:t>
             </a:fld>
             <a:endParaRPr lang="en-US"/>
           </a:p>
@@ -1299,7 +1299,7 @@
           <a:p>
             <a:fld id="{92AA035B-E45D-4D8B-A5AD-8F56B5D9C378}" type="datetimeFigureOut">
               <a:rPr lang="en-US" smtClean="0"/>
-              <a:t>9/12/2024</a:t>
+              <a:t>10/14/2024</a:t>
             </a:fld>
             <a:endParaRPr lang="en-US"/>
           </a:p>
@@ -1574,7 +1574,7 @@
           <a:p>
             <a:fld id="{92AA035B-E45D-4D8B-A5AD-8F56B5D9C378}" type="datetimeFigureOut">
               <a:rPr lang="en-US" smtClean="0"/>
-              <a:t>9/12/2024</a:t>
+              <a:t>10/14/2024</a:t>
             </a:fld>
             <a:endParaRPr lang="en-US"/>
           </a:p>
@@ -1839,7 +1839,7 @@
           <a:p>
             <a:fld id="{92AA035B-E45D-4D8B-A5AD-8F56B5D9C378}" type="datetimeFigureOut">
               <a:rPr lang="en-US" smtClean="0"/>
-              <a:t>9/12/2024</a:t>
+              <a:t>10/14/2024</a:t>
             </a:fld>
             <a:endParaRPr lang="en-US"/>
           </a:p>
@@ -2251,7 +2251,7 @@
           <a:p>
             <a:fld id="{92AA035B-E45D-4D8B-A5AD-8F56B5D9C378}" type="datetimeFigureOut">
               <a:rPr lang="en-US" smtClean="0"/>
-              <a:t>9/12/2024</a:t>
+              <a:t>10/14/2024</a:t>
             </a:fld>
             <a:endParaRPr lang="en-US"/>
           </a:p>
@@ -2392,7 +2392,7 @@
           <a:p>
             <a:fld id="{92AA035B-E45D-4D8B-A5AD-8F56B5D9C378}" type="datetimeFigureOut">
               <a:rPr lang="en-US" smtClean="0"/>
-              <a:t>9/12/2024</a:t>
+              <a:t>10/14/2024</a:t>
             </a:fld>
             <a:endParaRPr lang="en-US"/>
           </a:p>
@@ -2505,7 +2505,7 @@
           <a:p>
             <a:fld id="{92AA035B-E45D-4D8B-A5AD-8F56B5D9C378}" type="datetimeFigureOut">
               <a:rPr lang="en-US" smtClean="0"/>
-              <a:t>9/12/2024</a:t>
+              <a:t>10/14/2024</a:t>
             </a:fld>
             <a:endParaRPr lang="en-US"/>
           </a:p>
@@ -2816,7 +2816,7 @@
           <a:p>
             <a:fld id="{92AA035B-E45D-4D8B-A5AD-8F56B5D9C378}" type="datetimeFigureOut">
               <a:rPr lang="en-US" smtClean="0"/>
-              <a:t>9/12/2024</a:t>
+              <a:t>10/14/2024</a:t>
             </a:fld>
             <a:endParaRPr lang="en-US"/>
           </a:p>
@@ -3104,7 +3104,7 @@
           <a:p>
             <a:fld id="{92AA035B-E45D-4D8B-A5AD-8F56B5D9C378}" type="datetimeFigureOut">
               <a:rPr lang="en-US" smtClean="0"/>
-              <a:t>9/12/2024</a:t>
+              <a:t>10/14/2024</a:t>
             </a:fld>
             <a:endParaRPr lang="en-US"/>
           </a:p>
@@ -3345,7 +3345,7 @@
           <a:p>
             <a:fld id="{92AA035B-E45D-4D8B-A5AD-8F56B5D9C378}" type="datetimeFigureOut">
               <a:rPr lang="en-US" smtClean="0"/>
-              <a:t>9/12/2024</a:t>
+              <a:t>10/14/2024</a:t>
             </a:fld>
             <a:endParaRPr lang="en-US"/>
           </a:p>

--- a/p/pro/Ranjan-Sharma-Profile.pptx
+++ b/p/pro/Ranjan-Sharma-Profile.pptx
@@ -1,14 +1,14 @@
 
 <file path=ppt/presentation.xml><?xml version="1.0" encoding="utf-8"?>
-<p:presentation xmlns:a="http://schemas.openxmlformats.org/drawingml/2006/main" xmlns:r="http://schemas.openxmlformats.org/officeDocument/2006/relationships" xmlns:p="http://schemas.openxmlformats.org/presentationml/2006/main" saveSubsetFonts="1">
+<p:presentation xmlns:a="http://schemas.openxmlformats.org/drawingml/2006/main" xmlns:r="http://schemas.openxmlformats.org/officeDocument/2006/relationships" xmlns:p="http://schemas.openxmlformats.org/presentationml/2006/main">
   <p:sldMasterIdLst>
     <p:sldMasterId id="2147483648" r:id="rId1"/>
   </p:sldMasterIdLst>
   <p:notesMasterIdLst>
-    <p:notesMasterId r:id="rId3"/>
+    <p:notesMasterId r:id="rId4"/>
   </p:notesMasterIdLst>
   <p:sldIdLst>
-    <p:sldId id="279" r:id="rId2"/>
+    <p:sldId id="279" r:id="rId3"/>
   </p:sldIdLst>
   <p:sldSz cx="12192000" cy="6858000"/>
   <p:notesSz cx="6858000" cy="9144000"/>
@@ -107,11 +107,6 @@
       </a:defRPr>
     </a:lvl9pPr>
   </p:defaultTextStyle>
-  <p:extLst>
-    <p:ext uri="{EFAFB233-063F-42B5-8137-9DF3F51BA10A}">
-      <p15:sldGuideLst xmlns:p15="http://schemas.microsoft.com/office/powerpoint/2012/main"/>
-    </p:ext>
-  </p:extLst>
 </p:presentation>
 </file>
 
@@ -197,7 +192,6 @@
           <a:p>
             <a:fld id="{81255D54-DCC7-4AEA-9A0D-ADE65BFAD0FD}" type="datetimeFigureOut">
               <a:rPr lang="en-US" smtClean="0"/>
-              <a:t>10/14/2024</a:t>
             </a:fld>
             <a:endParaRPr lang="en-US"/>
           </a:p>
@@ -264,6 +258,7 @@
               <a:rPr lang="en-US"/>
               <a:t>Click to edit Master text styles</a:t>
             </a:r>
+            <a:endParaRPr lang="en-US"/>
           </a:p>
           <a:p>
             <a:pPr lvl="1"/>
@@ -271,6 +266,7 @@
               <a:rPr lang="en-US"/>
               <a:t>Second level</a:t>
             </a:r>
+            <a:endParaRPr lang="en-US"/>
           </a:p>
           <a:p>
             <a:pPr lvl="2"/>
@@ -278,6 +274,7 @@
               <a:rPr lang="en-US"/>
               <a:t>Third level</a:t>
             </a:r>
+            <a:endParaRPr lang="en-US"/>
           </a:p>
           <a:p>
             <a:pPr lvl="3"/>
@@ -285,6 +282,7 @@
               <a:rPr lang="en-US"/>
               <a:t>Fourth level</a:t>
             </a:r>
+            <a:endParaRPr lang="en-US"/>
           </a:p>
           <a:p>
             <a:pPr lvl="4"/>
@@ -292,6 +290,7 @@
               <a:rPr lang="en-US"/>
               <a:t>Fifth level</a:t>
             </a:r>
+            <a:endParaRPr lang="en-US"/>
           </a:p>
         </p:txBody>
       </p:sp>
@@ -355,18 +354,12 @@
           <a:p>
             <a:fld id="{BB2908C0-6246-437D-B523-3F58C28E7F03}" type="slidenum">
               <a:rPr lang="en-US" smtClean="0"/>
-              <a:t>‹#›</a:t>
             </a:fld>
             <a:endParaRPr lang="en-US"/>
           </a:p>
         </p:txBody>
       </p:sp>
     </p:spTree>
-    <p:extLst>
-      <p:ext uri="{BB962C8B-B14F-4D97-AF65-F5344CB8AC3E}">
-        <p14:creationId xmlns:p14="http://schemas.microsoft.com/office/powerpoint/2010/main" val="1909235618"/>
-      </p:ext>
-    </p:extLst>
   </p:cSld>
   <p:clrMap bg1="lt1" tx1="dk1" bg2="lt2" tx2="dk2" accent1="accent1" accent2="accent2" accent3="accent3" accent4="accent4" accent5="accent5" accent6="accent6" hlink="hlink" folHlink="folHlink"/>
   <p:notesStyle>
@@ -529,18 +522,12 @@
           <a:p>
             <a:fld id="{1DD3541C-E0F6-44E4-AF8B-BC12BB13288B}" type="slidenum">
               <a:rPr lang="en-US" smtClean="0"/>
-              <a:t>1</a:t>
             </a:fld>
             <a:endParaRPr lang="en-US"/>
           </a:p>
         </p:txBody>
       </p:sp>
     </p:spTree>
-    <p:extLst>
-      <p:ext uri="{BB962C8B-B14F-4D97-AF65-F5344CB8AC3E}">
-        <p14:creationId xmlns:p14="http://schemas.microsoft.com/office/powerpoint/2010/main" val="3870508135"/>
-      </p:ext>
-    </p:extLst>
   </p:cSld>
   <p:clrMapOvr>
     <a:masterClrMapping/>
@@ -567,13 +554,7 @@
       </p:grpSpPr>
       <p:sp>
         <p:nvSpPr>
-          <p:cNvPr id="2" name="Title 1">
-            <a:extLst>
-              <a:ext uri="{FF2B5EF4-FFF2-40B4-BE49-F238E27FC236}">
-                <a16:creationId xmlns:a16="http://schemas.microsoft.com/office/drawing/2014/main" id="{D4982749-68B1-4B2E-94C0-0243F1488F21}"/>
-              </a:ext>
-            </a:extLst>
-          </p:cNvPr>
+          <p:cNvPr id="2" name="Title 1"/>
           <p:cNvSpPr>
             <a:spLocks noGrp="1"/>
           </p:cNvSpPr>
@@ -599,18 +580,13 @@
               <a:rPr lang="en-US"/>
               <a:t>Click to edit Master title style</a:t>
             </a:r>
-          </a:p>
-        </p:txBody>
-      </p:sp>
-      <p:sp>
-        <p:nvSpPr>
-          <p:cNvPr id="3" name="Subtitle 2">
-            <a:extLst>
-              <a:ext uri="{FF2B5EF4-FFF2-40B4-BE49-F238E27FC236}">
-                <a16:creationId xmlns:a16="http://schemas.microsoft.com/office/drawing/2014/main" id="{23092FA9-52FA-4E85-9141-88D648F42B64}"/>
-              </a:ext>
-            </a:extLst>
-          </p:cNvPr>
+            <a:endParaRPr lang="en-US"/>
+          </a:p>
+        </p:txBody>
+      </p:sp>
+      <p:sp>
+        <p:nvSpPr>
+          <p:cNvPr id="3" name="Subtitle 2"/>
           <p:cNvSpPr>
             <a:spLocks noGrp="1"/>
           </p:cNvSpPr>
@@ -669,18 +645,13 @@
               <a:rPr lang="en-US"/>
               <a:t>Click to edit Master subtitle style</a:t>
             </a:r>
-          </a:p>
-        </p:txBody>
-      </p:sp>
-      <p:sp>
-        <p:nvSpPr>
-          <p:cNvPr id="4" name="Date Placeholder 3">
-            <a:extLst>
-              <a:ext uri="{FF2B5EF4-FFF2-40B4-BE49-F238E27FC236}">
-                <a16:creationId xmlns:a16="http://schemas.microsoft.com/office/drawing/2014/main" id="{D8331BD7-BC61-435B-BCE3-FE4E6E131F07}"/>
-              </a:ext>
-            </a:extLst>
-          </p:cNvPr>
+            <a:endParaRPr lang="en-US"/>
+          </a:p>
+        </p:txBody>
+      </p:sp>
+      <p:sp>
+        <p:nvSpPr>
+          <p:cNvPr id="4" name="Date Placeholder 3"/>
           <p:cNvSpPr>
             <a:spLocks noGrp="1"/>
           </p:cNvSpPr>
@@ -695,7 +666,6 @@
           <a:p>
             <a:fld id="{92AA035B-E45D-4D8B-A5AD-8F56B5D9C378}" type="datetimeFigureOut">
               <a:rPr lang="en-US" smtClean="0"/>
-              <a:t>10/14/2024</a:t>
             </a:fld>
             <a:endParaRPr lang="en-US"/>
           </a:p>
@@ -703,13 +673,7 @@
       </p:sp>
       <p:sp>
         <p:nvSpPr>
-          <p:cNvPr id="5" name="Footer Placeholder 4">
-            <a:extLst>
-              <a:ext uri="{FF2B5EF4-FFF2-40B4-BE49-F238E27FC236}">
-                <a16:creationId xmlns:a16="http://schemas.microsoft.com/office/drawing/2014/main" id="{3BC17939-5128-43A1-8604-2A72DF108EE4}"/>
-              </a:ext>
-            </a:extLst>
-          </p:cNvPr>
+          <p:cNvPr id="5" name="Footer Placeholder 4"/>
           <p:cNvSpPr>
             <a:spLocks noGrp="1"/>
           </p:cNvSpPr>
@@ -728,13 +692,7 @@
       </p:sp>
       <p:sp>
         <p:nvSpPr>
-          <p:cNvPr id="6" name="Slide Number Placeholder 5">
-            <a:extLst>
-              <a:ext uri="{FF2B5EF4-FFF2-40B4-BE49-F238E27FC236}">
-                <a16:creationId xmlns:a16="http://schemas.microsoft.com/office/drawing/2014/main" id="{BBF38A3B-4831-4253-86D7-D010ED1614B1}"/>
-              </a:ext>
-            </a:extLst>
-          </p:cNvPr>
+          <p:cNvPr id="6" name="Slide Number Placeholder 5"/>
           <p:cNvSpPr>
             <a:spLocks noGrp="1"/>
           </p:cNvSpPr>
@@ -749,18 +707,12 @@
           <a:p>
             <a:fld id="{407773CF-7DC8-448F-9E67-5D74719CA643}" type="slidenum">
               <a:rPr lang="en-US" smtClean="0"/>
-              <a:t>‹#›</a:t>
             </a:fld>
             <a:endParaRPr lang="en-US"/>
           </a:p>
         </p:txBody>
       </p:sp>
     </p:spTree>
-    <p:extLst>
-      <p:ext uri="{BB962C8B-B14F-4D97-AF65-F5344CB8AC3E}">
-        <p14:creationId xmlns:p14="http://schemas.microsoft.com/office/powerpoint/2010/main" val="929251247"/>
-      </p:ext>
-    </p:extLst>
   </p:cSld>
   <p:clrMapOvr>
     <a:masterClrMapping/>
@@ -787,13 +739,7 @@
       </p:grpSpPr>
       <p:sp>
         <p:nvSpPr>
-          <p:cNvPr id="2" name="Title 1">
-            <a:extLst>
-              <a:ext uri="{FF2B5EF4-FFF2-40B4-BE49-F238E27FC236}">
-                <a16:creationId xmlns:a16="http://schemas.microsoft.com/office/drawing/2014/main" id="{5B16C728-E571-41A8-BFD1-C4F16DA990CB}"/>
-              </a:ext>
-            </a:extLst>
-          </p:cNvPr>
+          <p:cNvPr id="2" name="Title 1"/>
           <p:cNvSpPr>
             <a:spLocks noGrp="1"/>
           </p:cNvSpPr>
@@ -810,18 +756,13 @@
               <a:rPr lang="en-US"/>
               <a:t>Click to edit Master title style</a:t>
             </a:r>
-          </a:p>
-        </p:txBody>
-      </p:sp>
-      <p:sp>
-        <p:nvSpPr>
-          <p:cNvPr id="3" name="Vertical Text Placeholder 2">
-            <a:extLst>
-              <a:ext uri="{FF2B5EF4-FFF2-40B4-BE49-F238E27FC236}">
-                <a16:creationId xmlns:a16="http://schemas.microsoft.com/office/drawing/2014/main" id="{B92939FA-3C08-44D4-BE92-68A3157B2B8F}"/>
-              </a:ext>
-            </a:extLst>
-          </p:cNvPr>
+            <a:endParaRPr lang="en-US"/>
+          </a:p>
+        </p:txBody>
+      </p:sp>
+      <p:sp>
+        <p:nvSpPr>
+          <p:cNvPr id="3" name="Vertical Text Placeholder 2"/>
           <p:cNvSpPr>
             <a:spLocks noGrp="1"/>
           </p:cNvSpPr>
@@ -839,6 +780,7 @@
               <a:rPr lang="en-US"/>
               <a:t>Click to edit Master text styles</a:t>
             </a:r>
+            <a:endParaRPr lang="en-US"/>
           </a:p>
           <a:p>
             <a:pPr lvl="1"/>
@@ -846,6 +788,7 @@
               <a:rPr lang="en-US"/>
               <a:t>Second level</a:t>
             </a:r>
+            <a:endParaRPr lang="en-US"/>
           </a:p>
           <a:p>
             <a:pPr lvl="2"/>
@@ -853,6 +796,7 @@
               <a:rPr lang="en-US"/>
               <a:t>Third level</a:t>
             </a:r>
+            <a:endParaRPr lang="en-US"/>
           </a:p>
           <a:p>
             <a:pPr lvl="3"/>
@@ -860,6 +804,7 @@
               <a:rPr lang="en-US"/>
               <a:t>Fourth level</a:t>
             </a:r>
+            <a:endParaRPr lang="en-US"/>
           </a:p>
           <a:p>
             <a:pPr lvl="4"/>
@@ -867,18 +812,13 @@
               <a:rPr lang="en-US"/>
               <a:t>Fifth level</a:t>
             </a:r>
-          </a:p>
-        </p:txBody>
-      </p:sp>
-      <p:sp>
-        <p:nvSpPr>
-          <p:cNvPr id="4" name="Date Placeholder 3">
-            <a:extLst>
-              <a:ext uri="{FF2B5EF4-FFF2-40B4-BE49-F238E27FC236}">
-                <a16:creationId xmlns:a16="http://schemas.microsoft.com/office/drawing/2014/main" id="{1F37C197-FBB3-4CD8-A1EC-115F96B9667D}"/>
-              </a:ext>
-            </a:extLst>
-          </p:cNvPr>
+            <a:endParaRPr lang="en-US"/>
+          </a:p>
+        </p:txBody>
+      </p:sp>
+      <p:sp>
+        <p:nvSpPr>
+          <p:cNvPr id="4" name="Date Placeholder 3"/>
           <p:cNvSpPr>
             <a:spLocks noGrp="1"/>
           </p:cNvSpPr>
@@ -893,7 +833,6 @@
           <a:p>
             <a:fld id="{92AA035B-E45D-4D8B-A5AD-8F56B5D9C378}" type="datetimeFigureOut">
               <a:rPr lang="en-US" smtClean="0"/>
-              <a:t>10/14/2024</a:t>
             </a:fld>
             <a:endParaRPr lang="en-US"/>
           </a:p>
@@ -901,13 +840,7 @@
       </p:sp>
       <p:sp>
         <p:nvSpPr>
-          <p:cNvPr id="5" name="Footer Placeholder 4">
-            <a:extLst>
-              <a:ext uri="{FF2B5EF4-FFF2-40B4-BE49-F238E27FC236}">
-                <a16:creationId xmlns:a16="http://schemas.microsoft.com/office/drawing/2014/main" id="{432F54B2-1B36-4D52-BAE5-1F1A4FA609B4}"/>
-              </a:ext>
-            </a:extLst>
-          </p:cNvPr>
+          <p:cNvPr id="5" name="Footer Placeholder 4"/>
           <p:cNvSpPr>
             <a:spLocks noGrp="1"/>
           </p:cNvSpPr>
@@ -926,13 +859,7 @@
       </p:sp>
       <p:sp>
         <p:nvSpPr>
-          <p:cNvPr id="6" name="Slide Number Placeholder 5">
-            <a:extLst>
-              <a:ext uri="{FF2B5EF4-FFF2-40B4-BE49-F238E27FC236}">
-                <a16:creationId xmlns:a16="http://schemas.microsoft.com/office/drawing/2014/main" id="{C391097B-9BC7-48B2-9F7F-1F30266EBD85}"/>
-              </a:ext>
-            </a:extLst>
-          </p:cNvPr>
+          <p:cNvPr id="6" name="Slide Number Placeholder 5"/>
           <p:cNvSpPr>
             <a:spLocks noGrp="1"/>
           </p:cNvSpPr>
@@ -947,18 +874,12 @@
           <a:p>
             <a:fld id="{407773CF-7DC8-448F-9E67-5D74719CA643}" type="slidenum">
               <a:rPr lang="en-US" smtClean="0"/>
-              <a:t>‹#›</a:t>
             </a:fld>
             <a:endParaRPr lang="en-US"/>
           </a:p>
         </p:txBody>
       </p:sp>
     </p:spTree>
-    <p:extLst>
-      <p:ext uri="{BB962C8B-B14F-4D97-AF65-F5344CB8AC3E}">
-        <p14:creationId xmlns:p14="http://schemas.microsoft.com/office/powerpoint/2010/main" val="1843289239"/>
-      </p:ext>
-    </p:extLst>
   </p:cSld>
   <p:clrMapOvr>
     <a:masterClrMapping/>
@@ -985,13 +906,7 @@
       </p:grpSpPr>
       <p:sp>
         <p:nvSpPr>
-          <p:cNvPr id="2" name="Vertical Title 1">
-            <a:extLst>
-              <a:ext uri="{FF2B5EF4-FFF2-40B4-BE49-F238E27FC236}">
-                <a16:creationId xmlns:a16="http://schemas.microsoft.com/office/drawing/2014/main" id="{250070EA-432C-4CE8-8900-2B38C1FA4D93}"/>
-              </a:ext>
-            </a:extLst>
-          </p:cNvPr>
+          <p:cNvPr id="2" name="Vertical Title 1"/>
           <p:cNvSpPr>
             <a:spLocks noGrp="1"/>
           </p:cNvSpPr>
@@ -1013,18 +928,13 @@
               <a:rPr lang="en-US"/>
               <a:t>Click to edit Master title style</a:t>
             </a:r>
-          </a:p>
-        </p:txBody>
-      </p:sp>
-      <p:sp>
-        <p:nvSpPr>
-          <p:cNvPr id="3" name="Vertical Text Placeholder 2">
-            <a:extLst>
-              <a:ext uri="{FF2B5EF4-FFF2-40B4-BE49-F238E27FC236}">
-                <a16:creationId xmlns:a16="http://schemas.microsoft.com/office/drawing/2014/main" id="{57288633-CFCD-43CA-B53F-1AD6D9301C28}"/>
-              </a:ext>
-            </a:extLst>
-          </p:cNvPr>
+            <a:endParaRPr lang="en-US"/>
+          </a:p>
+        </p:txBody>
+      </p:sp>
+      <p:sp>
+        <p:nvSpPr>
+          <p:cNvPr id="3" name="Vertical Text Placeholder 2"/>
           <p:cNvSpPr>
             <a:spLocks noGrp="1"/>
           </p:cNvSpPr>
@@ -1047,6 +957,7 @@
               <a:rPr lang="en-US"/>
               <a:t>Click to edit Master text styles</a:t>
             </a:r>
+            <a:endParaRPr lang="en-US"/>
           </a:p>
           <a:p>
             <a:pPr lvl="1"/>
@@ -1054,6 +965,7 @@
               <a:rPr lang="en-US"/>
               <a:t>Second level</a:t>
             </a:r>
+            <a:endParaRPr lang="en-US"/>
           </a:p>
           <a:p>
             <a:pPr lvl="2"/>
@@ -1061,6 +973,7 @@
               <a:rPr lang="en-US"/>
               <a:t>Third level</a:t>
             </a:r>
+            <a:endParaRPr lang="en-US"/>
           </a:p>
           <a:p>
             <a:pPr lvl="3"/>
@@ -1068,6 +981,7 @@
               <a:rPr lang="en-US"/>
               <a:t>Fourth level</a:t>
             </a:r>
+            <a:endParaRPr lang="en-US"/>
           </a:p>
           <a:p>
             <a:pPr lvl="4"/>
@@ -1075,18 +989,13 @@
               <a:rPr lang="en-US"/>
               <a:t>Fifth level</a:t>
             </a:r>
-          </a:p>
-        </p:txBody>
-      </p:sp>
-      <p:sp>
-        <p:nvSpPr>
-          <p:cNvPr id="4" name="Date Placeholder 3">
-            <a:extLst>
-              <a:ext uri="{FF2B5EF4-FFF2-40B4-BE49-F238E27FC236}">
-                <a16:creationId xmlns:a16="http://schemas.microsoft.com/office/drawing/2014/main" id="{E425644F-EEAF-4967-90A0-3C3F912AC77B}"/>
-              </a:ext>
-            </a:extLst>
-          </p:cNvPr>
+            <a:endParaRPr lang="en-US"/>
+          </a:p>
+        </p:txBody>
+      </p:sp>
+      <p:sp>
+        <p:nvSpPr>
+          <p:cNvPr id="4" name="Date Placeholder 3"/>
           <p:cNvSpPr>
             <a:spLocks noGrp="1"/>
           </p:cNvSpPr>
@@ -1101,7 +1010,6 @@
           <a:p>
             <a:fld id="{92AA035B-E45D-4D8B-A5AD-8F56B5D9C378}" type="datetimeFigureOut">
               <a:rPr lang="en-US" smtClean="0"/>
-              <a:t>10/14/2024</a:t>
             </a:fld>
             <a:endParaRPr lang="en-US"/>
           </a:p>
@@ -1109,13 +1017,7 @@
       </p:sp>
       <p:sp>
         <p:nvSpPr>
-          <p:cNvPr id="5" name="Footer Placeholder 4">
-            <a:extLst>
-              <a:ext uri="{FF2B5EF4-FFF2-40B4-BE49-F238E27FC236}">
-                <a16:creationId xmlns:a16="http://schemas.microsoft.com/office/drawing/2014/main" id="{DA428216-561A-40DA-941B-B03E9ED648E5}"/>
-              </a:ext>
-            </a:extLst>
-          </p:cNvPr>
+          <p:cNvPr id="5" name="Footer Placeholder 4"/>
           <p:cNvSpPr>
             <a:spLocks noGrp="1"/>
           </p:cNvSpPr>
@@ -1134,13 +1036,7 @@
       </p:sp>
       <p:sp>
         <p:nvSpPr>
-          <p:cNvPr id="6" name="Slide Number Placeholder 5">
-            <a:extLst>
-              <a:ext uri="{FF2B5EF4-FFF2-40B4-BE49-F238E27FC236}">
-                <a16:creationId xmlns:a16="http://schemas.microsoft.com/office/drawing/2014/main" id="{DB09FC1E-65A8-4BE2-B6B1-66F5AF364789}"/>
-              </a:ext>
-            </a:extLst>
-          </p:cNvPr>
+          <p:cNvPr id="6" name="Slide Number Placeholder 5"/>
           <p:cNvSpPr>
             <a:spLocks noGrp="1"/>
           </p:cNvSpPr>
@@ -1155,18 +1051,12 @@
           <a:p>
             <a:fld id="{407773CF-7DC8-448F-9E67-5D74719CA643}" type="slidenum">
               <a:rPr lang="en-US" smtClean="0"/>
-              <a:t>‹#›</a:t>
             </a:fld>
             <a:endParaRPr lang="en-US"/>
           </a:p>
         </p:txBody>
       </p:sp>
     </p:spTree>
-    <p:extLst>
-      <p:ext uri="{BB962C8B-B14F-4D97-AF65-F5344CB8AC3E}">
-        <p14:creationId xmlns:p14="http://schemas.microsoft.com/office/powerpoint/2010/main" val="2144880358"/>
-      </p:ext>
-    </p:extLst>
   </p:cSld>
   <p:clrMapOvr>
     <a:masterClrMapping/>
@@ -1193,13 +1083,7 @@
       </p:grpSpPr>
       <p:sp>
         <p:nvSpPr>
-          <p:cNvPr id="2" name="Title 1">
-            <a:extLst>
-              <a:ext uri="{FF2B5EF4-FFF2-40B4-BE49-F238E27FC236}">
-                <a16:creationId xmlns:a16="http://schemas.microsoft.com/office/drawing/2014/main" id="{EFAE83FB-D01F-4BF4-9E94-7BC363C51247}"/>
-              </a:ext>
-            </a:extLst>
-          </p:cNvPr>
+          <p:cNvPr id="2" name="Title 1"/>
           <p:cNvSpPr>
             <a:spLocks noGrp="1"/>
           </p:cNvSpPr>
@@ -1216,18 +1100,13 @@
               <a:rPr lang="en-US"/>
               <a:t>Click to edit Master title style</a:t>
             </a:r>
-          </a:p>
-        </p:txBody>
-      </p:sp>
-      <p:sp>
-        <p:nvSpPr>
-          <p:cNvPr id="3" name="Content Placeholder 2">
-            <a:extLst>
-              <a:ext uri="{FF2B5EF4-FFF2-40B4-BE49-F238E27FC236}">
-                <a16:creationId xmlns:a16="http://schemas.microsoft.com/office/drawing/2014/main" id="{8520B670-ECC2-4208-81E7-E1519C053923}"/>
-              </a:ext>
-            </a:extLst>
-          </p:cNvPr>
+            <a:endParaRPr lang="en-US"/>
+          </a:p>
+        </p:txBody>
+      </p:sp>
+      <p:sp>
+        <p:nvSpPr>
+          <p:cNvPr id="3" name="Content Placeholder 2"/>
           <p:cNvSpPr>
             <a:spLocks noGrp="1"/>
           </p:cNvSpPr>
@@ -1245,6 +1124,7 @@
               <a:rPr lang="en-US"/>
               <a:t>Click to edit Master text styles</a:t>
             </a:r>
+            <a:endParaRPr lang="en-US"/>
           </a:p>
           <a:p>
             <a:pPr lvl="1"/>
@@ -1252,6 +1132,7 @@
               <a:rPr lang="en-US"/>
               <a:t>Second level</a:t>
             </a:r>
+            <a:endParaRPr lang="en-US"/>
           </a:p>
           <a:p>
             <a:pPr lvl="2"/>
@@ -1259,6 +1140,7 @@
               <a:rPr lang="en-US"/>
               <a:t>Third level</a:t>
             </a:r>
+            <a:endParaRPr lang="en-US"/>
           </a:p>
           <a:p>
             <a:pPr lvl="3"/>
@@ -1266,6 +1148,7 @@
               <a:rPr lang="en-US"/>
               <a:t>Fourth level</a:t>
             </a:r>
+            <a:endParaRPr lang="en-US"/>
           </a:p>
           <a:p>
             <a:pPr lvl="4"/>
@@ -1273,18 +1156,13 @@
               <a:rPr lang="en-US"/>
               <a:t>Fifth level</a:t>
             </a:r>
-          </a:p>
-        </p:txBody>
-      </p:sp>
-      <p:sp>
-        <p:nvSpPr>
-          <p:cNvPr id="4" name="Date Placeholder 3">
-            <a:extLst>
-              <a:ext uri="{FF2B5EF4-FFF2-40B4-BE49-F238E27FC236}">
-                <a16:creationId xmlns:a16="http://schemas.microsoft.com/office/drawing/2014/main" id="{EC882DE7-9CC5-454C-98D7-F8069F84C5F2}"/>
-              </a:ext>
-            </a:extLst>
-          </p:cNvPr>
+            <a:endParaRPr lang="en-US"/>
+          </a:p>
+        </p:txBody>
+      </p:sp>
+      <p:sp>
+        <p:nvSpPr>
+          <p:cNvPr id="4" name="Date Placeholder 3"/>
           <p:cNvSpPr>
             <a:spLocks noGrp="1"/>
           </p:cNvSpPr>
@@ -1299,7 +1177,6 @@
           <a:p>
             <a:fld id="{92AA035B-E45D-4D8B-A5AD-8F56B5D9C378}" type="datetimeFigureOut">
               <a:rPr lang="en-US" smtClean="0"/>
-              <a:t>10/14/2024</a:t>
             </a:fld>
             <a:endParaRPr lang="en-US"/>
           </a:p>
@@ -1307,13 +1184,7 @@
       </p:sp>
       <p:sp>
         <p:nvSpPr>
-          <p:cNvPr id="5" name="Footer Placeholder 4">
-            <a:extLst>
-              <a:ext uri="{FF2B5EF4-FFF2-40B4-BE49-F238E27FC236}">
-                <a16:creationId xmlns:a16="http://schemas.microsoft.com/office/drawing/2014/main" id="{18EF2789-8BD2-46CE-AF7A-C5C7CBA6C770}"/>
-              </a:ext>
-            </a:extLst>
-          </p:cNvPr>
+          <p:cNvPr id="5" name="Footer Placeholder 4"/>
           <p:cNvSpPr>
             <a:spLocks noGrp="1"/>
           </p:cNvSpPr>
@@ -1332,13 +1203,7 @@
       </p:sp>
       <p:sp>
         <p:nvSpPr>
-          <p:cNvPr id="6" name="Slide Number Placeholder 5">
-            <a:extLst>
-              <a:ext uri="{FF2B5EF4-FFF2-40B4-BE49-F238E27FC236}">
-                <a16:creationId xmlns:a16="http://schemas.microsoft.com/office/drawing/2014/main" id="{1483733E-FD0B-4D48-AA33-EF8248254A67}"/>
-              </a:ext>
-            </a:extLst>
-          </p:cNvPr>
+          <p:cNvPr id="6" name="Slide Number Placeholder 5"/>
           <p:cNvSpPr>
             <a:spLocks noGrp="1"/>
           </p:cNvSpPr>
@@ -1353,18 +1218,12 @@
           <a:p>
             <a:fld id="{407773CF-7DC8-448F-9E67-5D74719CA643}" type="slidenum">
               <a:rPr lang="en-US" smtClean="0"/>
-              <a:t>‹#›</a:t>
             </a:fld>
             <a:endParaRPr lang="en-US"/>
           </a:p>
         </p:txBody>
       </p:sp>
     </p:spTree>
-    <p:extLst>
-      <p:ext uri="{BB962C8B-B14F-4D97-AF65-F5344CB8AC3E}">
-        <p14:creationId xmlns:p14="http://schemas.microsoft.com/office/powerpoint/2010/main" val="1223965945"/>
-      </p:ext>
-    </p:extLst>
   </p:cSld>
   <p:clrMapOvr>
     <a:masterClrMapping/>
@@ -1391,13 +1250,7 @@
       </p:grpSpPr>
       <p:sp>
         <p:nvSpPr>
-          <p:cNvPr id="2" name="Title 1">
-            <a:extLst>
-              <a:ext uri="{FF2B5EF4-FFF2-40B4-BE49-F238E27FC236}">
-                <a16:creationId xmlns:a16="http://schemas.microsoft.com/office/drawing/2014/main" id="{4B9DA49E-A05F-4407-8A7E-3695362978E2}"/>
-              </a:ext>
-            </a:extLst>
-          </p:cNvPr>
+          <p:cNvPr id="2" name="Title 1"/>
           <p:cNvSpPr>
             <a:spLocks noGrp="1"/>
           </p:cNvSpPr>
@@ -1423,18 +1276,13 @@
               <a:rPr lang="en-US"/>
               <a:t>Click to edit Master title style</a:t>
             </a:r>
-          </a:p>
-        </p:txBody>
-      </p:sp>
-      <p:sp>
-        <p:nvSpPr>
-          <p:cNvPr id="3" name="Text Placeholder 2">
-            <a:extLst>
-              <a:ext uri="{FF2B5EF4-FFF2-40B4-BE49-F238E27FC236}">
-                <a16:creationId xmlns:a16="http://schemas.microsoft.com/office/drawing/2014/main" id="{EC576627-9D85-4CA0-84E3-B0B24B44EE2C}"/>
-              </a:ext>
-            </a:extLst>
-          </p:cNvPr>
+            <a:endParaRPr lang="en-US"/>
+          </a:p>
+        </p:txBody>
+      </p:sp>
+      <p:sp>
+        <p:nvSpPr>
+          <p:cNvPr id="3" name="Text Placeholder 2"/>
           <p:cNvSpPr>
             <a:spLocks noGrp="1"/>
           </p:cNvSpPr>
@@ -1548,18 +1396,13 @@
               <a:rPr lang="en-US"/>
               <a:t>Click to edit Master text styles</a:t>
             </a:r>
-          </a:p>
-        </p:txBody>
-      </p:sp>
-      <p:sp>
-        <p:nvSpPr>
-          <p:cNvPr id="4" name="Date Placeholder 3">
-            <a:extLst>
-              <a:ext uri="{FF2B5EF4-FFF2-40B4-BE49-F238E27FC236}">
-                <a16:creationId xmlns:a16="http://schemas.microsoft.com/office/drawing/2014/main" id="{AE2E95B6-39DB-4988-A6F0-EFE723A34578}"/>
-              </a:ext>
-            </a:extLst>
-          </p:cNvPr>
+            <a:endParaRPr lang="en-US"/>
+          </a:p>
+        </p:txBody>
+      </p:sp>
+      <p:sp>
+        <p:nvSpPr>
+          <p:cNvPr id="4" name="Date Placeholder 3"/>
           <p:cNvSpPr>
             <a:spLocks noGrp="1"/>
           </p:cNvSpPr>
@@ -1574,7 +1417,6 @@
           <a:p>
             <a:fld id="{92AA035B-E45D-4D8B-A5AD-8F56B5D9C378}" type="datetimeFigureOut">
               <a:rPr lang="en-US" smtClean="0"/>
-              <a:t>10/14/2024</a:t>
             </a:fld>
             <a:endParaRPr lang="en-US"/>
           </a:p>
@@ -1582,13 +1424,7 @@
       </p:sp>
       <p:sp>
         <p:nvSpPr>
-          <p:cNvPr id="5" name="Footer Placeholder 4">
-            <a:extLst>
-              <a:ext uri="{FF2B5EF4-FFF2-40B4-BE49-F238E27FC236}">
-                <a16:creationId xmlns:a16="http://schemas.microsoft.com/office/drawing/2014/main" id="{07E93863-E172-4234-9A5A-D858B36E2E34}"/>
-              </a:ext>
-            </a:extLst>
-          </p:cNvPr>
+          <p:cNvPr id="5" name="Footer Placeholder 4"/>
           <p:cNvSpPr>
             <a:spLocks noGrp="1"/>
           </p:cNvSpPr>
@@ -1607,13 +1443,7 @@
       </p:sp>
       <p:sp>
         <p:nvSpPr>
-          <p:cNvPr id="6" name="Slide Number Placeholder 5">
-            <a:extLst>
-              <a:ext uri="{FF2B5EF4-FFF2-40B4-BE49-F238E27FC236}">
-                <a16:creationId xmlns:a16="http://schemas.microsoft.com/office/drawing/2014/main" id="{9540AC60-27D5-41A6-A4DB-86E2EA8B1613}"/>
-              </a:ext>
-            </a:extLst>
-          </p:cNvPr>
+          <p:cNvPr id="6" name="Slide Number Placeholder 5"/>
           <p:cNvSpPr>
             <a:spLocks noGrp="1"/>
           </p:cNvSpPr>
@@ -1628,18 +1458,12 @@
           <a:p>
             <a:fld id="{407773CF-7DC8-448F-9E67-5D74719CA643}" type="slidenum">
               <a:rPr lang="en-US" smtClean="0"/>
-              <a:t>‹#›</a:t>
             </a:fld>
             <a:endParaRPr lang="en-US"/>
           </a:p>
         </p:txBody>
       </p:sp>
     </p:spTree>
-    <p:extLst>
-      <p:ext uri="{BB962C8B-B14F-4D97-AF65-F5344CB8AC3E}">
-        <p14:creationId xmlns:p14="http://schemas.microsoft.com/office/powerpoint/2010/main" val="2611926974"/>
-      </p:ext>
-    </p:extLst>
   </p:cSld>
   <p:clrMapOvr>
     <a:masterClrMapping/>
@@ -1666,13 +1490,7 @@
       </p:grpSpPr>
       <p:sp>
         <p:nvSpPr>
-          <p:cNvPr id="2" name="Title 1">
-            <a:extLst>
-              <a:ext uri="{FF2B5EF4-FFF2-40B4-BE49-F238E27FC236}">
-                <a16:creationId xmlns:a16="http://schemas.microsoft.com/office/drawing/2014/main" id="{1CAC6A12-0596-470E-A80D-7043BB4D9CD6}"/>
-              </a:ext>
-            </a:extLst>
-          </p:cNvPr>
+          <p:cNvPr id="2" name="Title 1"/>
           <p:cNvSpPr>
             <a:spLocks noGrp="1"/>
           </p:cNvSpPr>
@@ -1689,18 +1507,13 @@
               <a:rPr lang="en-US"/>
               <a:t>Click to edit Master title style</a:t>
             </a:r>
-          </a:p>
-        </p:txBody>
-      </p:sp>
-      <p:sp>
-        <p:nvSpPr>
-          <p:cNvPr id="3" name="Content Placeholder 2">
-            <a:extLst>
-              <a:ext uri="{FF2B5EF4-FFF2-40B4-BE49-F238E27FC236}">
-                <a16:creationId xmlns:a16="http://schemas.microsoft.com/office/drawing/2014/main" id="{F65DFE80-E1B7-4B4C-A310-E6C3727ABA17}"/>
-              </a:ext>
-            </a:extLst>
-          </p:cNvPr>
+            <a:endParaRPr lang="en-US"/>
+          </a:p>
+        </p:txBody>
+      </p:sp>
+      <p:sp>
+        <p:nvSpPr>
+          <p:cNvPr id="3" name="Content Placeholder 2"/>
           <p:cNvSpPr>
             <a:spLocks noGrp="1"/>
           </p:cNvSpPr>
@@ -1723,6 +1536,7 @@
               <a:rPr lang="en-US"/>
               <a:t>Click to edit Master text styles</a:t>
             </a:r>
+            <a:endParaRPr lang="en-US"/>
           </a:p>
           <a:p>
             <a:pPr lvl="1"/>
@@ -1730,6 +1544,7 @@
               <a:rPr lang="en-US"/>
               <a:t>Second level</a:t>
             </a:r>
+            <a:endParaRPr lang="en-US"/>
           </a:p>
           <a:p>
             <a:pPr lvl="2"/>
@@ -1737,6 +1552,7 @@
               <a:rPr lang="en-US"/>
               <a:t>Third level</a:t>
             </a:r>
+            <a:endParaRPr lang="en-US"/>
           </a:p>
           <a:p>
             <a:pPr lvl="3"/>
@@ -1744,6 +1560,7 @@
               <a:rPr lang="en-US"/>
               <a:t>Fourth level</a:t>
             </a:r>
+            <a:endParaRPr lang="en-US"/>
           </a:p>
           <a:p>
             <a:pPr lvl="4"/>
@@ -1751,18 +1568,13 @@
               <a:rPr lang="en-US"/>
               <a:t>Fifth level</a:t>
             </a:r>
-          </a:p>
-        </p:txBody>
-      </p:sp>
-      <p:sp>
-        <p:nvSpPr>
-          <p:cNvPr id="4" name="Content Placeholder 3">
-            <a:extLst>
-              <a:ext uri="{FF2B5EF4-FFF2-40B4-BE49-F238E27FC236}">
-                <a16:creationId xmlns:a16="http://schemas.microsoft.com/office/drawing/2014/main" id="{D87F1CE4-185E-496C-98F3-5AD7DE934DBB}"/>
-              </a:ext>
-            </a:extLst>
-          </p:cNvPr>
+            <a:endParaRPr lang="en-US"/>
+          </a:p>
+        </p:txBody>
+      </p:sp>
+      <p:sp>
+        <p:nvSpPr>
+          <p:cNvPr id="4" name="Content Placeholder 3"/>
           <p:cNvSpPr>
             <a:spLocks noGrp="1"/>
           </p:cNvSpPr>
@@ -1785,6 +1597,7 @@
               <a:rPr lang="en-US"/>
               <a:t>Click to edit Master text styles</a:t>
             </a:r>
+            <a:endParaRPr lang="en-US"/>
           </a:p>
           <a:p>
             <a:pPr lvl="1"/>
@@ -1792,6 +1605,7 @@
               <a:rPr lang="en-US"/>
               <a:t>Second level</a:t>
             </a:r>
+            <a:endParaRPr lang="en-US"/>
           </a:p>
           <a:p>
             <a:pPr lvl="2"/>
@@ -1799,6 +1613,7 @@
               <a:rPr lang="en-US"/>
               <a:t>Third level</a:t>
             </a:r>
+            <a:endParaRPr lang="en-US"/>
           </a:p>
           <a:p>
             <a:pPr lvl="3"/>
@@ -1806,6 +1621,7 @@
               <a:rPr lang="en-US"/>
               <a:t>Fourth level</a:t>
             </a:r>
+            <a:endParaRPr lang="en-US"/>
           </a:p>
           <a:p>
             <a:pPr lvl="4"/>
@@ -1813,18 +1629,13 @@
               <a:rPr lang="en-US"/>
               <a:t>Fifth level</a:t>
             </a:r>
-          </a:p>
-        </p:txBody>
-      </p:sp>
-      <p:sp>
-        <p:nvSpPr>
-          <p:cNvPr id="5" name="Date Placeholder 4">
-            <a:extLst>
-              <a:ext uri="{FF2B5EF4-FFF2-40B4-BE49-F238E27FC236}">
-                <a16:creationId xmlns:a16="http://schemas.microsoft.com/office/drawing/2014/main" id="{D5E63C29-008D-40DC-BE27-AF8156D7297D}"/>
-              </a:ext>
-            </a:extLst>
-          </p:cNvPr>
+            <a:endParaRPr lang="en-US"/>
+          </a:p>
+        </p:txBody>
+      </p:sp>
+      <p:sp>
+        <p:nvSpPr>
+          <p:cNvPr id="5" name="Date Placeholder 4"/>
           <p:cNvSpPr>
             <a:spLocks noGrp="1"/>
           </p:cNvSpPr>
@@ -1839,7 +1650,6 @@
           <a:p>
             <a:fld id="{92AA035B-E45D-4D8B-A5AD-8F56B5D9C378}" type="datetimeFigureOut">
               <a:rPr lang="en-US" smtClean="0"/>
-              <a:t>10/14/2024</a:t>
             </a:fld>
             <a:endParaRPr lang="en-US"/>
           </a:p>
@@ -1847,13 +1657,7 @@
       </p:sp>
       <p:sp>
         <p:nvSpPr>
-          <p:cNvPr id="6" name="Footer Placeholder 5">
-            <a:extLst>
-              <a:ext uri="{FF2B5EF4-FFF2-40B4-BE49-F238E27FC236}">
-                <a16:creationId xmlns:a16="http://schemas.microsoft.com/office/drawing/2014/main" id="{0BA300AE-5CF8-45D1-A165-8823A9BDF1E3}"/>
-              </a:ext>
-            </a:extLst>
-          </p:cNvPr>
+          <p:cNvPr id="6" name="Footer Placeholder 5"/>
           <p:cNvSpPr>
             <a:spLocks noGrp="1"/>
           </p:cNvSpPr>
@@ -1872,13 +1676,7 @@
       </p:sp>
       <p:sp>
         <p:nvSpPr>
-          <p:cNvPr id="7" name="Slide Number Placeholder 6">
-            <a:extLst>
-              <a:ext uri="{FF2B5EF4-FFF2-40B4-BE49-F238E27FC236}">
-                <a16:creationId xmlns:a16="http://schemas.microsoft.com/office/drawing/2014/main" id="{51E3BE93-0428-414D-943F-B5803CC3F1AD}"/>
-              </a:ext>
-            </a:extLst>
-          </p:cNvPr>
+          <p:cNvPr id="7" name="Slide Number Placeholder 6"/>
           <p:cNvSpPr>
             <a:spLocks noGrp="1"/>
           </p:cNvSpPr>
@@ -1893,18 +1691,12 @@
           <a:p>
             <a:fld id="{407773CF-7DC8-448F-9E67-5D74719CA643}" type="slidenum">
               <a:rPr lang="en-US" smtClean="0"/>
-              <a:t>‹#›</a:t>
             </a:fld>
             <a:endParaRPr lang="en-US"/>
           </a:p>
         </p:txBody>
       </p:sp>
     </p:spTree>
-    <p:extLst>
-      <p:ext uri="{BB962C8B-B14F-4D97-AF65-F5344CB8AC3E}">
-        <p14:creationId xmlns:p14="http://schemas.microsoft.com/office/powerpoint/2010/main" val="936116654"/>
-      </p:ext>
-    </p:extLst>
   </p:cSld>
   <p:clrMapOvr>
     <a:masterClrMapping/>
@@ -1931,13 +1723,7 @@
       </p:grpSpPr>
       <p:sp>
         <p:nvSpPr>
-          <p:cNvPr id="2" name="Title 1">
-            <a:extLst>
-              <a:ext uri="{FF2B5EF4-FFF2-40B4-BE49-F238E27FC236}">
-                <a16:creationId xmlns:a16="http://schemas.microsoft.com/office/drawing/2014/main" id="{626D9110-1ED9-4EF3-A712-7D739082B080}"/>
-              </a:ext>
-            </a:extLst>
-          </p:cNvPr>
+          <p:cNvPr id="2" name="Title 1"/>
           <p:cNvSpPr>
             <a:spLocks noGrp="1"/>
           </p:cNvSpPr>
@@ -1959,18 +1745,13 @@
               <a:rPr lang="en-US"/>
               <a:t>Click to edit Master title style</a:t>
             </a:r>
-          </a:p>
-        </p:txBody>
-      </p:sp>
-      <p:sp>
-        <p:nvSpPr>
-          <p:cNvPr id="3" name="Text Placeholder 2">
-            <a:extLst>
-              <a:ext uri="{FF2B5EF4-FFF2-40B4-BE49-F238E27FC236}">
-                <a16:creationId xmlns:a16="http://schemas.microsoft.com/office/drawing/2014/main" id="{C077D589-4CF4-445A-BE12-B49286F621CC}"/>
-              </a:ext>
-            </a:extLst>
-          </p:cNvPr>
+            <a:endParaRPr lang="en-US"/>
+          </a:p>
+        </p:txBody>
+      </p:sp>
+      <p:sp>
+        <p:nvSpPr>
+          <p:cNvPr id="3" name="Text Placeholder 2"/>
           <p:cNvSpPr>
             <a:spLocks noGrp="1"/>
           </p:cNvSpPr>
@@ -2030,18 +1811,13 @@
               <a:rPr lang="en-US"/>
               <a:t>Click to edit Master text styles</a:t>
             </a:r>
-          </a:p>
-        </p:txBody>
-      </p:sp>
-      <p:sp>
-        <p:nvSpPr>
-          <p:cNvPr id="4" name="Content Placeholder 3">
-            <a:extLst>
-              <a:ext uri="{FF2B5EF4-FFF2-40B4-BE49-F238E27FC236}">
-                <a16:creationId xmlns:a16="http://schemas.microsoft.com/office/drawing/2014/main" id="{25826F51-4C97-4B58-A175-1D9F18371CC6}"/>
-              </a:ext>
-            </a:extLst>
-          </p:cNvPr>
+            <a:endParaRPr lang="en-US"/>
+          </a:p>
+        </p:txBody>
+      </p:sp>
+      <p:sp>
+        <p:nvSpPr>
+          <p:cNvPr id="4" name="Content Placeholder 3"/>
           <p:cNvSpPr>
             <a:spLocks noGrp="1"/>
           </p:cNvSpPr>
@@ -2064,6 +1840,7 @@
               <a:rPr lang="en-US"/>
               <a:t>Click to edit Master text styles</a:t>
             </a:r>
+            <a:endParaRPr lang="en-US"/>
           </a:p>
           <a:p>
             <a:pPr lvl="1"/>
@@ -2071,6 +1848,7 @@
               <a:rPr lang="en-US"/>
               <a:t>Second level</a:t>
             </a:r>
+            <a:endParaRPr lang="en-US"/>
           </a:p>
           <a:p>
             <a:pPr lvl="2"/>
@@ -2078,6 +1856,7 @@
               <a:rPr lang="en-US"/>
               <a:t>Third level</a:t>
             </a:r>
+            <a:endParaRPr lang="en-US"/>
           </a:p>
           <a:p>
             <a:pPr lvl="3"/>
@@ -2085,6 +1864,7 @@
               <a:rPr lang="en-US"/>
               <a:t>Fourth level</a:t>
             </a:r>
+            <a:endParaRPr lang="en-US"/>
           </a:p>
           <a:p>
             <a:pPr lvl="4"/>
@@ -2092,18 +1872,13 @@
               <a:rPr lang="en-US"/>
               <a:t>Fifth level</a:t>
             </a:r>
-          </a:p>
-        </p:txBody>
-      </p:sp>
-      <p:sp>
-        <p:nvSpPr>
-          <p:cNvPr id="5" name="Text Placeholder 4">
-            <a:extLst>
-              <a:ext uri="{FF2B5EF4-FFF2-40B4-BE49-F238E27FC236}">
-                <a16:creationId xmlns:a16="http://schemas.microsoft.com/office/drawing/2014/main" id="{3120680D-ADEA-4D88-A95E-89291FAF7F1D}"/>
-              </a:ext>
-            </a:extLst>
-          </p:cNvPr>
+            <a:endParaRPr lang="en-US"/>
+          </a:p>
+        </p:txBody>
+      </p:sp>
+      <p:sp>
+        <p:nvSpPr>
+          <p:cNvPr id="5" name="Text Placeholder 4"/>
           <p:cNvSpPr>
             <a:spLocks noGrp="1"/>
           </p:cNvSpPr>
@@ -2163,18 +1938,13 @@
               <a:rPr lang="en-US"/>
               <a:t>Click to edit Master text styles</a:t>
             </a:r>
-          </a:p>
-        </p:txBody>
-      </p:sp>
-      <p:sp>
-        <p:nvSpPr>
-          <p:cNvPr id="6" name="Content Placeholder 5">
-            <a:extLst>
-              <a:ext uri="{FF2B5EF4-FFF2-40B4-BE49-F238E27FC236}">
-                <a16:creationId xmlns:a16="http://schemas.microsoft.com/office/drawing/2014/main" id="{1279ECE5-147C-4D29-BF0E-A12051CF1DC2}"/>
-              </a:ext>
-            </a:extLst>
-          </p:cNvPr>
+            <a:endParaRPr lang="en-US"/>
+          </a:p>
+        </p:txBody>
+      </p:sp>
+      <p:sp>
+        <p:nvSpPr>
+          <p:cNvPr id="6" name="Content Placeholder 5"/>
           <p:cNvSpPr>
             <a:spLocks noGrp="1"/>
           </p:cNvSpPr>
@@ -2197,6 +1967,7 @@
               <a:rPr lang="en-US"/>
               <a:t>Click to edit Master text styles</a:t>
             </a:r>
+            <a:endParaRPr lang="en-US"/>
           </a:p>
           <a:p>
             <a:pPr lvl="1"/>
@@ -2204,6 +1975,7 @@
               <a:rPr lang="en-US"/>
               <a:t>Second level</a:t>
             </a:r>
+            <a:endParaRPr lang="en-US"/>
           </a:p>
           <a:p>
             <a:pPr lvl="2"/>
@@ -2211,6 +1983,7 @@
               <a:rPr lang="en-US"/>
               <a:t>Third level</a:t>
             </a:r>
+            <a:endParaRPr lang="en-US"/>
           </a:p>
           <a:p>
             <a:pPr lvl="3"/>
@@ -2218,6 +1991,7 @@
               <a:rPr lang="en-US"/>
               <a:t>Fourth level</a:t>
             </a:r>
+            <a:endParaRPr lang="en-US"/>
           </a:p>
           <a:p>
             <a:pPr lvl="4"/>
@@ -2225,18 +1999,13 @@
               <a:rPr lang="en-US"/>
               <a:t>Fifth level</a:t>
             </a:r>
-          </a:p>
-        </p:txBody>
-      </p:sp>
-      <p:sp>
-        <p:nvSpPr>
-          <p:cNvPr id="7" name="Date Placeholder 6">
-            <a:extLst>
-              <a:ext uri="{FF2B5EF4-FFF2-40B4-BE49-F238E27FC236}">
-                <a16:creationId xmlns:a16="http://schemas.microsoft.com/office/drawing/2014/main" id="{A8356CEA-2245-47C0-A03A-972779CBAF22}"/>
-              </a:ext>
-            </a:extLst>
-          </p:cNvPr>
+            <a:endParaRPr lang="en-US"/>
+          </a:p>
+        </p:txBody>
+      </p:sp>
+      <p:sp>
+        <p:nvSpPr>
+          <p:cNvPr id="7" name="Date Placeholder 6"/>
           <p:cNvSpPr>
             <a:spLocks noGrp="1"/>
           </p:cNvSpPr>
@@ -2251,7 +2020,6 @@
           <a:p>
             <a:fld id="{92AA035B-E45D-4D8B-A5AD-8F56B5D9C378}" type="datetimeFigureOut">
               <a:rPr lang="en-US" smtClean="0"/>
-              <a:t>10/14/2024</a:t>
             </a:fld>
             <a:endParaRPr lang="en-US"/>
           </a:p>
@@ -2259,13 +2027,7 @@
       </p:sp>
       <p:sp>
         <p:nvSpPr>
-          <p:cNvPr id="8" name="Footer Placeholder 7">
-            <a:extLst>
-              <a:ext uri="{FF2B5EF4-FFF2-40B4-BE49-F238E27FC236}">
-                <a16:creationId xmlns:a16="http://schemas.microsoft.com/office/drawing/2014/main" id="{1A38023C-FD05-42D0-A0C0-4C6F1B44A8EA}"/>
-              </a:ext>
-            </a:extLst>
-          </p:cNvPr>
+          <p:cNvPr id="8" name="Footer Placeholder 7"/>
           <p:cNvSpPr>
             <a:spLocks noGrp="1"/>
           </p:cNvSpPr>
@@ -2284,13 +2046,7 @@
       </p:sp>
       <p:sp>
         <p:nvSpPr>
-          <p:cNvPr id="9" name="Slide Number Placeholder 8">
-            <a:extLst>
-              <a:ext uri="{FF2B5EF4-FFF2-40B4-BE49-F238E27FC236}">
-                <a16:creationId xmlns:a16="http://schemas.microsoft.com/office/drawing/2014/main" id="{2B2CC0F5-B11C-4F88-9B94-2E7C53B57D1E}"/>
-              </a:ext>
-            </a:extLst>
-          </p:cNvPr>
+          <p:cNvPr id="9" name="Slide Number Placeholder 8"/>
           <p:cNvSpPr>
             <a:spLocks noGrp="1"/>
           </p:cNvSpPr>
@@ -2305,18 +2061,12 @@
           <a:p>
             <a:fld id="{407773CF-7DC8-448F-9E67-5D74719CA643}" type="slidenum">
               <a:rPr lang="en-US" smtClean="0"/>
-              <a:t>‹#›</a:t>
             </a:fld>
             <a:endParaRPr lang="en-US"/>
           </a:p>
         </p:txBody>
       </p:sp>
     </p:spTree>
-    <p:extLst>
-      <p:ext uri="{BB962C8B-B14F-4D97-AF65-F5344CB8AC3E}">
-        <p14:creationId xmlns:p14="http://schemas.microsoft.com/office/powerpoint/2010/main" val="1059438458"/>
-      </p:ext>
-    </p:extLst>
   </p:cSld>
   <p:clrMapOvr>
     <a:masterClrMapping/>
@@ -2343,13 +2093,7 @@
       </p:grpSpPr>
       <p:sp>
         <p:nvSpPr>
-          <p:cNvPr id="2" name="Title 1">
-            <a:extLst>
-              <a:ext uri="{FF2B5EF4-FFF2-40B4-BE49-F238E27FC236}">
-                <a16:creationId xmlns:a16="http://schemas.microsoft.com/office/drawing/2014/main" id="{CC215963-BD83-4E2C-AE4F-C96147C19BA5}"/>
-              </a:ext>
-            </a:extLst>
-          </p:cNvPr>
+          <p:cNvPr id="2" name="Title 1"/>
           <p:cNvSpPr>
             <a:spLocks noGrp="1"/>
           </p:cNvSpPr>
@@ -2366,18 +2110,13 @@
               <a:rPr lang="en-US"/>
               <a:t>Click to edit Master title style</a:t>
             </a:r>
-          </a:p>
-        </p:txBody>
-      </p:sp>
-      <p:sp>
-        <p:nvSpPr>
-          <p:cNvPr id="3" name="Date Placeholder 2">
-            <a:extLst>
-              <a:ext uri="{FF2B5EF4-FFF2-40B4-BE49-F238E27FC236}">
-                <a16:creationId xmlns:a16="http://schemas.microsoft.com/office/drawing/2014/main" id="{4B06C688-B0F5-4609-B323-996C19775B1D}"/>
-              </a:ext>
-            </a:extLst>
-          </p:cNvPr>
+            <a:endParaRPr lang="en-US"/>
+          </a:p>
+        </p:txBody>
+      </p:sp>
+      <p:sp>
+        <p:nvSpPr>
+          <p:cNvPr id="3" name="Date Placeholder 2"/>
           <p:cNvSpPr>
             <a:spLocks noGrp="1"/>
           </p:cNvSpPr>
@@ -2392,7 +2131,6 @@
           <a:p>
             <a:fld id="{92AA035B-E45D-4D8B-A5AD-8F56B5D9C378}" type="datetimeFigureOut">
               <a:rPr lang="en-US" smtClean="0"/>
-              <a:t>10/14/2024</a:t>
             </a:fld>
             <a:endParaRPr lang="en-US"/>
           </a:p>
@@ -2400,13 +2138,7 @@
       </p:sp>
       <p:sp>
         <p:nvSpPr>
-          <p:cNvPr id="4" name="Footer Placeholder 3">
-            <a:extLst>
-              <a:ext uri="{FF2B5EF4-FFF2-40B4-BE49-F238E27FC236}">
-                <a16:creationId xmlns:a16="http://schemas.microsoft.com/office/drawing/2014/main" id="{B8935276-166E-4A78-BDBF-AF2959B0651F}"/>
-              </a:ext>
-            </a:extLst>
-          </p:cNvPr>
+          <p:cNvPr id="4" name="Footer Placeholder 3"/>
           <p:cNvSpPr>
             <a:spLocks noGrp="1"/>
           </p:cNvSpPr>
@@ -2425,13 +2157,7 @@
       </p:sp>
       <p:sp>
         <p:nvSpPr>
-          <p:cNvPr id="5" name="Slide Number Placeholder 4">
-            <a:extLst>
-              <a:ext uri="{FF2B5EF4-FFF2-40B4-BE49-F238E27FC236}">
-                <a16:creationId xmlns:a16="http://schemas.microsoft.com/office/drawing/2014/main" id="{7DCC39B0-3B20-45A6-BD77-6A35E87BEED3}"/>
-              </a:ext>
-            </a:extLst>
-          </p:cNvPr>
+          <p:cNvPr id="5" name="Slide Number Placeholder 4"/>
           <p:cNvSpPr>
             <a:spLocks noGrp="1"/>
           </p:cNvSpPr>
@@ -2446,18 +2172,12 @@
           <a:p>
             <a:fld id="{407773CF-7DC8-448F-9E67-5D74719CA643}" type="slidenum">
               <a:rPr lang="en-US" smtClean="0"/>
-              <a:t>‹#›</a:t>
             </a:fld>
             <a:endParaRPr lang="en-US"/>
           </a:p>
         </p:txBody>
       </p:sp>
     </p:spTree>
-    <p:extLst>
-      <p:ext uri="{BB962C8B-B14F-4D97-AF65-F5344CB8AC3E}">
-        <p14:creationId xmlns:p14="http://schemas.microsoft.com/office/powerpoint/2010/main" val="3168964335"/>
-      </p:ext>
-    </p:extLst>
   </p:cSld>
   <p:clrMapOvr>
     <a:masterClrMapping/>
@@ -2484,13 +2204,7 @@
       </p:grpSpPr>
       <p:sp>
         <p:nvSpPr>
-          <p:cNvPr id="2" name="Date Placeholder 1">
-            <a:extLst>
-              <a:ext uri="{FF2B5EF4-FFF2-40B4-BE49-F238E27FC236}">
-                <a16:creationId xmlns:a16="http://schemas.microsoft.com/office/drawing/2014/main" id="{A1BD2D05-3153-430F-ABFF-91FB021F5348}"/>
-              </a:ext>
-            </a:extLst>
-          </p:cNvPr>
+          <p:cNvPr id="2" name="Date Placeholder 1"/>
           <p:cNvSpPr>
             <a:spLocks noGrp="1"/>
           </p:cNvSpPr>
@@ -2505,7 +2219,6 @@
           <a:p>
             <a:fld id="{92AA035B-E45D-4D8B-A5AD-8F56B5D9C378}" type="datetimeFigureOut">
               <a:rPr lang="en-US" smtClean="0"/>
-              <a:t>10/14/2024</a:t>
             </a:fld>
             <a:endParaRPr lang="en-US"/>
           </a:p>
@@ -2513,13 +2226,7 @@
       </p:sp>
       <p:sp>
         <p:nvSpPr>
-          <p:cNvPr id="3" name="Footer Placeholder 2">
-            <a:extLst>
-              <a:ext uri="{FF2B5EF4-FFF2-40B4-BE49-F238E27FC236}">
-                <a16:creationId xmlns:a16="http://schemas.microsoft.com/office/drawing/2014/main" id="{D002BE7B-EB38-4232-B4FC-69C3A0D63813}"/>
-              </a:ext>
-            </a:extLst>
-          </p:cNvPr>
+          <p:cNvPr id="3" name="Footer Placeholder 2"/>
           <p:cNvSpPr>
             <a:spLocks noGrp="1"/>
           </p:cNvSpPr>
@@ -2538,13 +2245,7 @@
       </p:sp>
       <p:sp>
         <p:nvSpPr>
-          <p:cNvPr id="4" name="Slide Number Placeholder 3">
-            <a:extLst>
-              <a:ext uri="{FF2B5EF4-FFF2-40B4-BE49-F238E27FC236}">
-                <a16:creationId xmlns:a16="http://schemas.microsoft.com/office/drawing/2014/main" id="{3EB23169-236B-4D4E-853B-DB6A1C067C56}"/>
-              </a:ext>
-            </a:extLst>
-          </p:cNvPr>
+          <p:cNvPr id="4" name="Slide Number Placeholder 3"/>
           <p:cNvSpPr>
             <a:spLocks noGrp="1"/>
           </p:cNvSpPr>
@@ -2559,18 +2260,12 @@
           <a:p>
             <a:fld id="{407773CF-7DC8-448F-9E67-5D74719CA643}" type="slidenum">
               <a:rPr lang="en-US" smtClean="0"/>
-              <a:t>‹#›</a:t>
             </a:fld>
             <a:endParaRPr lang="en-US"/>
           </a:p>
         </p:txBody>
       </p:sp>
     </p:spTree>
-    <p:extLst>
-      <p:ext uri="{BB962C8B-B14F-4D97-AF65-F5344CB8AC3E}">
-        <p14:creationId xmlns:p14="http://schemas.microsoft.com/office/powerpoint/2010/main" val="1428743628"/>
-      </p:ext>
-    </p:extLst>
   </p:cSld>
   <p:clrMapOvr>
     <a:masterClrMapping/>
@@ -2597,13 +2292,7 @@
       </p:grpSpPr>
       <p:sp>
         <p:nvSpPr>
-          <p:cNvPr id="2" name="Title 1">
-            <a:extLst>
-              <a:ext uri="{FF2B5EF4-FFF2-40B4-BE49-F238E27FC236}">
-                <a16:creationId xmlns:a16="http://schemas.microsoft.com/office/drawing/2014/main" id="{BB0D5E1F-96FC-4096-9AAA-D45274D3C27A}"/>
-              </a:ext>
-            </a:extLst>
-          </p:cNvPr>
+          <p:cNvPr id="2" name="Title 1"/>
           <p:cNvSpPr>
             <a:spLocks noGrp="1"/>
           </p:cNvSpPr>
@@ -2629,18 +2318,13 @@
               <a:rPr lang="en-US"/>
               <a:t>Click to edit Master title style</a:t>
             </a:r>
-          </a:p>
-        </p:txBody>
-      </p:sp>
-      <p:sp>
-        <p:nvSpPr>
-          <p:cNvPr id="3" name="Content Placeholder 2">
-            <a:extLst>
-              <a:ext uri="{FF2B5EF4-FFF2-40B4-BE49-F238E27FC236}">
-                <a16:creationId xmlns:a16="http://schemas.microsoft.com/office/drawing/2014/main" id="{1015F443-174D-48EE-8CE9-22BAC648CE9B}"/>
-              </a:ext>
-            </a:extLst>
-          </p:cNvPr>
+            <a:endParaRPr lang="en-US"/>
+          </a:p>
+        </p:txBody>
+      </p:sp>
+      <p:sp>
+        <p:nvSpPr>
+          <p:cNvPr id="3" name="Content Placeholder 2"/>
           <p:cNvSpPr>
             <a:spLocks noGrp="1"/>
           </p:cNvSpPr>
@@ -2691,6 +2375,7 @@
               <a:rPr lang="en-US"/>
               <a:t>Click to edit Master text styles</a:t>
             </a:r>
+            <a:endParaRPr lang="en-US"/>
           </a:p>
           <a:p>
             <a:pPr lvl="1"/>
@@ -2698,6 +2383,7 @@
               <a:rPr lang="en-US"/>
               <a:t>Second level</a:t>
             </a:r>
+            <a:endParaRPr lang="en-US"/>
           </a:p>
           <a:p>
             <a:pPr lvl="2"/>
@@ -2705,6 +2391,7 @@
               <a:rPr lang="en-US"/>
               <a:t>Third level</a:t>
             </a:r>
+            <a:endParaRPr lang="en-US"/>
           </a:p>
           <a:p>
             <a:pPr lvl="3"/>
@@ -2712,6 +2399,7 @@
               <a:rPr lang="en-US"/>
               <a:t>Fourth level</a:t>
             </a:r>
+            <a:endParaRPr lang="en-US"/>
           </a:p>
           <a:p>
             <a:pPr lvl="4"/>
@@ -2719,18 +2407,13 @@
               <a:rPr lang="en-US"/>
               <a:t>Fifth level</a:t>
             </a:r>
-          </a:p>
-        </p:txBody>
-      </p:sp>
-      <p:sp>
-        <p:nvSpPr>
-          <p:cNvPr id="4" name="Text Placeholder 3">
-            <a:extLst>
-              <a:ext uri="{FF2B5EF4-FFF2-40B4-BE49-F238E27FC236}">
-                <a16:creationId xmlns:a16="http://schemas.microsoft.com/office/drawing/2014/main" id="{8080BC49-B4AB-40BD-A852-9F5830A7BF1C}"/>
-              </a:ext>
-            </a:extLst>
-          </p:cNvPr>
+            <a:endParaRPr lang="en-US"/>
+          </a:p>
+        </p:txBody>
+      </p:sp>
+      <p:sp>
+        <p:nvSpPr>
+          <p:cNvPr id="4" name="Text Placeholder 3"/>
           <p:cNvSpPr>
             <a:spLocks noGrp="1"/>
           </p:cNvSpPr>
@@ -2790,18 +2473,13 @@
               <a:rPr lang="en-US"/>
               <a:t>Click to edit Master text styles</a:t>
             </a:r>
-          </a:p>
-        </p:txBody>
-      </p:sp>
-      <p:sp>
-        <p:nvSpPr>
-          <p:cNvPr id="5" name="Date Placeholder 4">
-            <a:extLst>
-              <a:ext uri="{FF2B5EF4-FFF2-40B4-BE49-F238E27FC236}">
-                <a16:creationId xmlns:a16="http://schemas.microsoft.com/office/drawing/2014/main" id="{2E71BBB7-9188-4207-AB31-BF37A868062E}"/>
-              </a:ext>
-            </a:extLst>
-          </p:cNvPr>
+            <a:endParaRPr lang="en-US"/>
+          </a:p>
+        </p:txBody>
+      </p:sp>
+      <p:sp>
+        <p:nvSpPr>
+          <p:cNvPr id="5" name="Date Placeholder 4"/>
           <p:cNvSpPr>
             <a:spLocks noGrp="1"/>
           </p:cNvSpPr>
@@ -2816,7 +2494,6 @@
           <a:p>
             <a:fld id="{92AA035B-E45D-4D8B-A5AD-8F56B5D9C378}" type="datetimeFigureOut">
               <a:rPr lang="en-US" smtClean="0"/>
-              <a:t>10/14/2024</a:t>
             </a:fld>
             <a:endParaRPr lang="en-US"/>
           </a:p>
@@ -2824,13 +2501,7 @@
       </p:sp>
       <p:sp>
         <p:nvSpPr>
-          <p:cNvPr id="6" name="Footer Placeholder 5">
-            <a:extLst>
-              <a:ext uri="{FF2B5EF4-FFF2-40B4-BE49-F238E27FC236}">
-                <a16:creationId xmlns:a16="http://schemas.microsoft.com/office/drawing/2014/main" id="{CDC7D46B-8662-4050-8AF7-81B5BAFF3177}"/>
-              </a:ext>
-            </a:extLst>
-          </p:cNvPr>
+          <p:cNvPr id="6" name="Footer Placeholder 5"/>
           <p:cNvSpPr>
             <a:spLocks noGrp="1"/>
           </p:cNvSpPr>
@@ -2849,13 +2520,7 @@
       </p:sp>
       <p:sp>
         <p:nvSpPr>
-          <p:cNvPr id="7" name="Slide Number Placeholder 6">
-            <a:extLst>
-              <a:ext uri="{FF2B5EF4-FFF2-40B4-BE49-F238E27FC236}">
-                <a16:creationId xmlns:a16="http://schemas.microsoft.com/office/drawing/2014/main" id="{613CCC6A-2A9C-420B-B8C8-9AF43EA8126E}"/>
-              </a:ext>
-            </a:extLst>
-          </p:cNvPr>
+          <p:cNvPr id="7" name="Slide Number Placeholder 6"/>
           <p:cNvSpPr>
             <a:spLocks noGrp="1"/>
           </p:cNvSpPr>
@@ -2870,18 +2535,12 @@
           <a:p>
             <a:fld id="{407773CF-7DC8-448F-9E67-5D74719CA643}" type="slidenum">
               <a:rPr lang="en-US" smtClean="0"/>
-              <a:t>‹#›</a:t>
             </a:fld>
             <a:endParaRPr lang="en-US"/>
           </a:p>
         </p:txBody>
       </p:sp>
     </p:spTree>
-    <p:extLst>
-      <p:ext uri="{BB962C8B-B14F-4D97-AF65-F5344CB8AC3E}">
-        <p14:creationId xmlns:p14="http://schemas.microsoft.com/office/powerpoint/2010/main" val="4141245274"/>
-      </p:ext>
-    </p:extLst>
   </p:cSld>
   <p:clrMapOvr>
     <a:masterClrMapping/>
@@ -2908,13 +2567,7 @@
       </p:grpSpPr>
       <p:sp>
         <p:nvSpPr>
-          <p:cNvPr id="2" name="Title 1">
-            <a:extLst>
-              <a:ext uri="{FF2B5EF4-FFF2-40B4-BE49-F238E27FC236}">
-                <a16:creationId xmlns:a16="http://schemas.microsoft.com/office/drawing/2014/main" id="{46FF07C4-9B38-4B79-81D6-69212E2EEBBA}"/>
-              </a:ext>
-            </a:extLst>
-          </p:cNvPr>
+          <p:cNvPr id="2" name="Title 1"/>
           <p:cNvSpPr>
             <a:spLocks noGrp="1"/>
           </p:cNvSpPr>
@@ -2940,18 +2593,13 @@
               <a:rPr lang="en-US"/>
               <a:t>Click to edit Master title style</a:t>
             </a:r>
-          </a:p>
-        </p:txBody>
-      </p:sp>
-      <p:sp>
-        <p:nvSpPr>
-          <p:cNvPr id="3" name="Picture Placeholder 2">
-            <a:extLst>
-              <a:ext uri="{FF2B5EF4-FFF2-40B4-BE49-F238E27FC236}">
-                <a16:creationId xmlns:a16="http://schemas.microsoft.com/office/drawing/2014/main" id="{12489932-286C-42C7-AA77-D466E741BD1C}"/>
-              </a:ext>
-            </a:extLst>
-          </p:cNvPr>
+            <a:endParaRPr lang="en-US"/>
+          </a:p>
+        </p:txBody>
+      </p:sp>
+      <p:sp>
+        <p:nvSpPr>
+          <p:cNvPr id="3" name="Picture Placeholder 2"/>
           <p:cNvSpPr>
             <a:spLocks noGrp="1"/>
           </p:cNvSpPr>
@@ -3012,13 +2660,7 @@
       </p:sp>
       <p:sp>
         <p:nvSpPr>
-          <p:cNvPr id="4" name="Text Placeholder 3">
-            <a:extLst>
-              <a:ext uri="{FF2B5EF4-FFF2-40B4-BE49-F238E27FC236}">
-                <a16:creationId xmlns:a16="http://schemas.microsoft.com/office/drawing/2014/main" id="{6764DC0D-06BB-4A07-9EE8-BF56F1C89414}"/>
-              </a:ext>
-            </a:extLst>
-          </p:cNvPr>
+          <p:cNvPr id="4" name="Text Placeholder 3"/>
           <p:cNvSpPr>
             <a:spLocks noGrp="1"/>
           </p:cNvSpPr>
@@ -3078,18 +2720,13 @@
               <a:rPr lang="en-US"/>
               <a:t>Click to edit Master text styles</a:t>
             </a:r>
-          </a:p>
-        </p:txBody>
-      </p:sp>
-      <p:sp>
-        <p:nvSpPr>
-          <p:cNvPr id="5" name="Date Placeholder 4">
-            <a:extLst>
-              <a:ext uri="{FF2B5EF4-FFF2-40B4-BE49-F238E27FC236}">
-                <a16:creationId xmlns:a16="http://schemas.microsoft.com/office/drawing/2014/main" id="{064A64D6-14AD-4006-B75C-1CD55F98E8BF}"/>
-              </a:ext>
-            </a:extLst>
-          </p:cNvPr>
+            <a:endParaRPr lang="en-US"/>
+          </a:p>
+        </p:txBody>
+      </p:sp>
+      <p:sp>
+        <p:nvSpPr>
+          <p:cNvPr id="5" name="Date Placeholder 4"/>
           <p:cNvSpPr>
             <a:spLocks noGrp="1"/>
           </p:cNvSpPr>
@@ -3104,7 +2741,6 @@
           <a:p>
             <a:fld id="{92AA035B-E45D-4D8B-A5AD-8F56B5D9C378}" type="datetimeFigureOut">
               <a:rPr lang="en-US" smtClean="0"/>
-              <a:t>10/14/2024</a:t>
             </a:fld>
             <a:endParaRPr lang="en-US"/>
           </a:p>
@@ -3112,13 +2748,7 @@
       </p:sp>
       <p:sp>
         <p:nvSpPr>
-          <p:cNvPr id="6" name="Footer Placeholder 5">
-            <a:extLst>
-              <a:ext uri="{FF2B5EF4-FFF2-40B4-BE49-F238E27FC236}">
-                <a16:creationId xmlns:a16="http://schemas.microsoft.com/office/drawing/2014/main" id="{69FA504A-E388-444C-858E-B1FDF463B3AC}"/>
-              </a:ext>
-            </a:extLst>
-          </p:cNvPr>
+          <p:cNvPr id="6" name="Footer Placeholder 5"/>
           <p:cNvSpPr>
             <a:spLocks noGrp="1"/>
           </p:cNvSpPr>
@@ -3137,13 +2767,7 @@
       </p:sp>
       <p:sp>
         <p:nvSpPr>
-          <p:cNvPr id="7" name="Slide Number Placeholder 6">
-            <a:extLst>
-              <a:ext uri="{FF2B5EF4-FFF2-40B4-BE49-F238E27FC236}">
-                <a16:creationId xmlns:a16="http://schemas.microsoft.com/office/drawing/2014/main" id="{21C1F808-C1C7-49B1-977C-21811E06CFE1}"/>
-              </a:ext>
-            </a:extLst>
-          </p:cNvPr>
+          <p:cNvPr id="7" name="Slide Number Placeholder 6"/>
           <p:cNvSpPr>
             <a:spLocks noGrp="1"/>
           </p:cNvSpPr>
@@ -3158,18 +2782,12 @@
           <a:p>
             <a:fld id="{407773CF-7DC8-448F-9E67-5D74719CA643}" type="slidenum">
               <a:rPr lang="en-US" smtClean="0"/>
-              <a:t>‹#›</a:t>
             </a:fld>
             <a:endParaRPr lang="en-US"/>
           </a:p>
         </p:txBody>
       </p:sp>
     </p:spTree>
-    <p:extLst>
-      <p:ext uri="{BB962C8B-B14F-4D97-AF65-F5344CB8AC3E}">
-        <p14:creationId xmlns:p14="http://schemas.microsoft.com/office/powerpoint/2010/main" val="270868691"/>
-      </p:ext>
-    </p:extLst>
   </p:cSld>
   <p:clrMapOvr>
     <a:masterClrMapping/>
@@ -3201,13 +2819,7 @@
       </p:grpSpPr>
       <p:sp>
         <p:nvSpPr>
-          <p:cNvPr id="2" name="Title Placeholder 1">
-            <a:extLst>
-              <a:ext uri="{FF2B5EF4-FFF2-40B4-BE49-F238E27FC236}">
-                <a16:creationId xmlns:a16="http://schemas.microsoft.com/office/drawing/2014/main" id="{B07FC2DB-9B50-4BE4-8C9B-BE3E529AAED9}"/>
-              </a:ext>
-            </a:extLst>
-          </p:cNvPr>
+          <p:cNvPr id="2" name="Title Placeholder 1"/>
           <p:cNvSpPr>
             <a:spLocks noGrp="1"/>
           </p:cNvSpPr>
@@ -3234,18 +2846,13 @@
               <a:rPr lang="en-US"/>
               <a:t>Click to edit Master title style</a:t>
             </a:r>
-          </a:p>
-        </p:txBody>
-      </p:sp>
-      <p:sp>
-        <p:nvSpPr>
-          <p:cNvPr id="3" name="Text Placeholder 2">
-            <a:extLst>
-              <a:ext uri="{FF2B5EF4-FFF2-40B4-BE49-F238E27FC236}">
-                <a16:creationId xmlns:a16="http://schemas.microsoft.com/office/drawing/2014/main" id="{D4C2EFB4-9713-43DA-8F70-64F70029B885}"/>
-              </a:ext>
-            </a:extLst>
-          </p:cNvPr>
+            <a:endParaRPr lang="en-US"/>
+          </a:p>
+        </p:txBody>
+      </p:sp>
+      <p:sp>
+        <p:nvSpPr>
+          <p:cNvPr id="3" name="Text Placeholder 2"/>
           <p:cNvSpPr>
             <a:spLocks noGrp="1"/>
           </p:cNvSpPr>
@@ -3273,6 +2880,7 @@
               <a:rPr lang="en-US"/>
               <a:t>Click to edit Master text styles</a:t>
             </a:r>
+            <a:endParaRPr lang="en-US"/>
           </a:p>
           <a:p>
             <a:pPr lvl="1"/>
@@ -3280,6 +2888,7 @@
               <a:rPr lang="en-US"/>
               <a:t>Second level</a:t>
             </a:r>
+            <a:endParaRPr lang="en-US"/>
           </a:p>
           <a:p>
             <a:pPr lvl="2"/>
@@ -3287,6 +2896,7 @@
               <a:rPr lang="en-US"/>
               <a:t>Third level</a:t>
             </a:r>
+            <a:endParaRPr lang="en-US"/>
           </a:p>
           <a:p>
             <a:pPr lvl="3"/>
@@ -3294,6 +2904,7 @@
               <a:rPr lang="en-US"/>
               <a:t>Fourth level</a:t>
             </a:r>
+            <a:endParaRPr lang="en-US"/>
           </a:p>
           <a:p>
             <a:pPr lvl="4"/>
@@ -3301,18 +2912,13 @@
               <a:rPr lang="en-US"/>
               <a:t>Fifth level</a:t>
             </a:r>
-          </a:p>
-        </p:txBody>
-      </p:sp>
-      <p:sp>
-        <p:nvSpPr>
-          <p:cNvPr id="4" name="Date Placeholder 3">
-            <a:extLst>
-              <a:ext uri="{FF2B5EF4-FFF2-40B4-BE49-F238E27FC236}">
-                <a16:creationId xmlns:a16="http://schemas.microsoft.com/office/drawing/2014/main" id="{91F3E482-45C0-4F65-874F-F23E4821CD51}"/>
-              </a:ext>
-            </a:extLst>
-          </p:cNvPr>
+            <a:endParaRPr lang="en-US"/>
+          </a:p>
+        </p:txBody>
+      </p:sp>
+      <p:sp>
+        <p:nvSpPr>
+          <p:cNvPr id="4" name="Date Placeholder 3"/>
           <p:cNvSpPr>
             <a:spLocks noGrp="1"/>
           </p:cNvSpPr>
@@ -3345,7 +2951,6 @@
           <a:p>
             <a:fld id="{92AA035B-E45D-4D8B-A5AD-8F56B5D9C378}" type="datetimeFigureOut">
               <a:rPr lang="en-US" smtClean="0"/>
-              <a:t>10/14/2024</a:t>
             </a:fld>
             <a:endParaRPr lang="en-US"/>
           </a:p>
@@ -3353,13 +2958,7 @@
       </p:sp>
       <p:sp>
         <p:nvSpPr>
-          <p:cNvPr id="5" name="Footer Placeholder 4">
-            <a:extLst>
-              <a:ext uri="{FF2B5EF4-FFF2-40B4-BE49-F238E27FC236}">
-                <a16:creationId xmlns:a16="http://schemas.microsoft.com/office/drawing/2014/main" id="{5D975F4E-BBD8-44B0-90D8-7864C7051193}"/>
-              </a:ext>
-            </a:extLst>
-          </p:cNvPr>
+          <p:cNvPr id="5" name="Footer Placeholder 4"/>
           <p:cNvSpPr>
             <a:spLocks noGrp="1"/>
           </p:cNvSpPr>
@@ -3396,13 +2995,7 @@
       </p:sp>
       <p:sp>
         <p:nvSpPr>
-          <p:cNvPr id="6" name="Slide Number Placeholder 5">
-            <a:extLst>
-              <a:ext uri="{FF2B5EF4-FFF2-40B4-BE49-F238E27FC236}">
-                <a16:creationId xmlns:a16="http://schemas.microsoft.com/office/drawing/2014/main" id="{51722F64-50E2-45F4-8A87-4599AF12222E}"/>
-              </a:ext>
-            </a:extLst>
-          </p:cNvPr>
+          <p:cNvPr id="6" name="Slide Number Placeholder 5"/>
           <p:cNvSpPr>
             <a:spLocks noGrp="1"/>
           </p:cNvSpPr>
@@ -3435,18 +3028,12 @@
           <a:p>
             <a:fld id="{407773CF-7DC8-448F-9E67-5D74719CA643}" type="slidenum">
               <a:rPr lang="en-US" smtClean="0"/>
-              <a:t>‹#›</a:t>
             </a:fld>
             <a:endParaRPr lang="en-US"/>
           </a:p>
         </p:txBody>
       </p:sp>
     </p:spTree>
-    <p:extLst>
-      <p:ext uri="{BB962C8B-B14F-4D97-AF65-F5344CB8AC3E}">
-        <p14:creationId xmlns:p14="http://schemas.microsoft.com/office/powerpoint/2010/main" val="4048016469"/>
-      </p:ext>
-    </p:extLst>
   </p:cSld>
   <p:clrMap bg1="lt1" tx1="dk1" bg2="lt2" tx2="dk2" accent1="accent1" accent2="accent2" accent3="accent3" accent4="accent4" accent5="accent5" accent6="accent6" hlink="hlink" folHlink="folHlink"/>
   <p:sldLayoutIdLst>
@@ -3792,18 +3379,17 @@
               </a:rPr>
               <a:t>Technical Specialist </a:t>
             </a:r>
+            <a:endParaRPr lang="en-IN" sz="2000" b="1" dirty="0">
+              <a:solidFill>
+                <a:schemeClr val="accent1"/>
+              </a:solidFill>
+            </a:endParaRPr>
           </a:p>
         </p:txBody>
       </p:sp>
       <p:grpSp>
         <p:nvGrpSpPr>
-          <p:cNvPr id="6" name="Group 5">
-            <a:extLst>
-              <a:ext uri="{FF2B5EF4-FFF2-40B4-BE49-F238E27FC236}">
-                <a16:creationId xmlns:a16="http://schemas.microsoft.com/office/drawing/2014/main" id="{2B2C71B1-FFA4-4FB5-B6A7-D25E245EE937}"/>
-              </a:ext>
-            </a:extLst>
-          </p:cNvPr>
+          <p:cNvPr id="6" name="Group 5"/>
           <p:cNvGrpSpPr/>
           <p:nvPr/>
         </p:nvGrpSpPr>
@@ -3887,7 +3473,6 @@
                 <a:buSzTx/>
                 <a:buFontTx/>
                 <a:buNone/>
-                <a:tabLst/>
                 <a:defRPr/>
               </a:pPr>
               <a:r>
@@ -3901,12 +3486,26 @@
                   <a:effectLst/>
                   <a:uLnTx/>
                   <a:uFillTx/>
-                  <a:latin typeface="Calibri" pitchFamily="34" charset="0"/>
+                  <a:latin typeface="Calibri" panose="020F0502020204030204" pitchFamily="34" charset="0"/>
                   <a:ea typeface="+mn-ea"/>
-                  <a:cs typeface="Calibri" pitchFamily="34" charset="0"/>
+                  <a:cs typeface="Calibri" panose="020F0502020204030204" pitchFamily="34" charset="0"/>
                 </a:rPr>
                 <a:t>HIGHLIGHTS </a:t>
               </a:r>
+              <a:endParaRPr kumimoji="0" lang="da-DK" sz="1700" b="1" i="0" u="none" strike="noStrike" kern="1200" cap="none" spc="0" normalizeH="0" baseline="0" noProof="0" dirty="0">
+                <a:ln>
+                  <a:noFill/>
+                </a:ln>
+                <a:solidFill>
+                  <a:srgbClr val="FF9675"/>
+                </a:solidFill>
+                <a:effectLst/>
+                <a:uLnTx/>
+                <a:uFillTx/>
+                <a:latin typeface="Calibri" panose="020F0502020204030204" pitchFamily="34" charset="0"/>
+                <a:ea typeface="+mn-ea"/>
+                <a:cs typeface="Calibri" panose="020F0502020204030204" pitchFamily="34" charset="0"/>
+              </a:endParaRPr>
             </a:p>
             <a:p>
               <a:pPr marL="0" marR="0" lvl="0" indent="0" algn="ctr" defTabSz="914400" rtl="0" eaLnBrk="1" fontAlgn="base" latinLnBrk="0" hangingPunct="1">
@@ -3923,7 +3522,6 @@
                 <a:buSzTx/>
                 <a:buFontTx/>
                 <a:buNone/>
-                <a:tabLst/>
                 <a:defRPr/>
               </a:pPr>
               <a:r>
@@ -3937,9 +3535,9 @@
                   <a:effectLst/>
                   <a:uLnTx/>
                   <a:uFillTx/>
-                  <a:latin typeface="Calibri" pitchFamily="34" charset="0"/>
+                  <a:latin typeface="Calibri" panose="020F0502020204030204" pitchFamily="34" charset="0"/>
                   <a:ea typeface="+mn-ea"/>
-                  <a:cs typeface="Calibri" pitchFamily="34" charset="0"/>
+                  <a:cs typeface="Calibri" panose="020F0502020204030204" pitchFamily="34" charset="0"/>
                 </a:rPr>
                 <a:t>&amp; SKILLS</a:t>
               </a:r>
@@ -3953,9 +3551,9 @@
                 <a:effectLst/>
                 <a:uLnTx/>
                 <a:uFillTx/>
-                <a:latin typeface="Calibri" pitchFamily="34" charset="0"/>
+                <a:latin typeface="Calibri" panose="020F0502020204030204" pitchFamily="34" charset="0"/>
                 <a:ea typeface="+mn-ea"/>
-                <a:cs typeface="Calibri" pitchFamily="34" charset="0"/>
+                <a:cs typeface="Calibri" panose="020F0502020204030204" pitchFamily="34" charset="0"/>
               </a:endParaRPr>
             </a:p>
           </p:txBody>
@@ -3977,7 +3575,7 @@
               <a:avLst/>
             </a:prstGeom>
             <a:blipFill dpi="0" rotWithShape="0">
-              <a:blip r:embed="rId3"/>
+              <a:blip r:embed="rId1"/>
               <a:srcRect/>
               <a:stretch>
                 <a:fillRect/>
@@ -3986,16 +3584,10 @@
             <a:ln w="9525">
               <a:noFill/>
               <a:round/>
-              <a:headEnd/>
-              <a:tailEnd/>
             </a:ln>
           </p:spPr>
           <p:txBody>
-            <a:bodyPr vert="horz" wrap="square" lIns="91440" tIns="45720" rIns="91440" bIns="45720" numCol="1" anchor="t" anchorCtr="0" compatLnSpc="1">
-              <a:prstTxWarp prst="textNoShape">
-                <a:avLst/>
-              </a:prstTxWarp>
-            </a:bodyPr>
+            <a:bodyPr vert="horz" wrap="square" lIns="91440" tIns="45720" rIns="91440" bIns="45720" numCol="1" anchor="t" anchorCtr="0" compatLnSpc="1"/>
             <a:lstStyle/>
             <a:p>
               <a:pPr marL="0" marR="0" lvl="0" indent="0" algn="l" defTabSz="914400" rtl="0" eaLnBrk="1" fontAlgn="base" latinLnBrk="0" hangingPunct="1">
@@ -4012,7 +3604,6 @@
                 <a:buSzTx/>
                 <a:buFontTx/>
                 <a:buNone/>
-                <a:tabLst/>
                 <a:defRPr/>
               </a:pPr>
               <a:endParaRPr kumimoji="0" lang="en-US" sz="3600" b="0" i="0" u="none" strike="noStrike" kern="1200" cap="none" spc="0" normalizeH="0" baseline="0" noProof="0" dirty="0">
@@ -4035,13 +3626,7 @@
       </p:grpSp>
       <p:grpSp>
         <p:nvGrpSpPr>
-          <p:cNvPr id="3" name="Group 2">
-            <a:extLst>
-              <a:ext uri="{FF2B5EF4-FFF2-40B4-BE49-F238E27FC236}">
-                <a16:creationId xmlns:a16="http://schemas.microsoft.com/office/drawing/2014/main" id="{338C1E7B-53CB-468C-8B7A-58357DE7478D}"/>
-              </a:ext>
-            </a:extLst>
-          </p:cNvPr>
+          <p:cNvPr id="3" name="Group 2"/>
           <p:cNvGrpSpPr/>
           <p:nvPr/>
         </p:nvGrpSpPr>
@@ -4056,9 +3641,7 @@
         <p:cxnSp>
           <p:nvCxnSpPr>
             <p:cNvPr id="34" name="Straight Connector 33"/>
-            <p:cNvCxnSpPr>
-              <a:cxnSpLocks/>
-            </p:cNvCxnSpPr>
+            <p:cNvCxnSpPr/>
             <p:nvPr/>
           </p:nvCxnSpPr>
           <p:spPr bwMode="auto">
@@ -4127,7 +3710,6 @@
                 <a:buSzTx/>
                 <a:buFontTx/>
                 <a:buNone/>
-                <a:tabLst/>
                 <a:defRPr/>
               </a:pPr>
               <a:r>
@@ -4141,9 +3723,9 @@
                   <a:effectLst/>
                   <a:uLnTx/>
                   <a:uFillTx/>
-                  <a:latin typeface="Calibri" pitchFamily="34" charset="0"/>
+                  <a:latin typeface="Calibri" panose="020F0502020204030204" pitchFamily="34" charset="0"/>
                   <a:ea typeface="+mn-ea"/>
-                  <a:cs typeface="Calibri" pitchFamily="34" charset="0"/>
+                  <a:cs typeface="Calibri" panose="020F0502020204030204" pitchFamily="34" charset="0"/>
                 </a:rPr>
                 <a:t>EXPERIENCE</a:t>
               </a:r>
@@ -4157,9 +3739,9 @@
                 <a:effectLst/>
                 <a:uLnTx/>
                 <a:uFillTx/>
-                <a:latin typeface="Calibri" pitchFamily="34" charset="0"/>
+                <a:latin typeface="Calibri" panose="020F0502020204030204" pitchFamily="34" charset="0"/>
                 <a:ea typeface="+mn-ea"/>
-                <a:cs typeface="Calibri" pitchFamily="34" charset="0"/>
+                <a:cs typeface="Calibri" panose="020F0502020204030204" pitchFamily="34" charset="0"/>
               </a:endParaRPr>
             </a:p>
           </p:txBody>
@@ -4181,7 +3763,7 @@
               <a:avLst/>
             </a:prstGeom>
             <a:blipFill dpi="0" rotWithShape="0">
-              <a:blip r:embed="rId4"/>
+              <a:blip r:embed="rId2"/>
               <a:srcRect/>
               <a:stretch>
                 <a:fillRect/>
@@ -4190,16 +3772,10 @@
             <a:ln w="9525">
               <a:noFill/>
               <a:round/>
-              <a:headEnd/>
-              <a:tailEnd/>
             </a:ln>
           </p:spPr>
           <p:txBody>
-            <a:bodyPr vert="horz" wrap="square" lIns="91440" tIns="45720" rIns="91440" bIns="45720" numCol="1" anchor="t" anchorCtr="0" compatLnSpc="1">
-              <a:prstTxWarp prst="textNoShape">
-                <a:avLst/>
-              </a:prstTxWarp>
-            </a:bodyPr>
+            <a:bodyPr vert="horz" wrap="square" lIns="91440" tIns="45720" rIns="91440" bIns="45720" numCol="1" anchor="t" anchorCtr="0" compatLnSpc="1"/>
             <a:lstStyle/>
             <a:p>
               <a:pPr marL="0" marR="0" lvl="0" indent="0" algn="l" defTabSz="914400" rtl="0" eaLnBrk="1" fontAlgn="base" latinLnBrk="0" hangingPunct="1">
@@ -4216,7 +3792,6 @@
                 <a:buSzTx/>
                 <a:buFontTx/>
                 <a:buNone/>
-                <a:tabLst/>
                 <a:defRPr/>
               </a:pPr>
               <a:endParaRPr kumimoji="0" lang="en-US" sz="3600" b="0" i="0" u="none" strike="noStrike" kern="1200" cap="none" spc="0" normalizeH="0" baseline="0" noProof="0" dirty="0">
@@ -4239,13 +3814,7 @@
       </p:grpSp>
       <p:grpSp>
         <p:nvGrpSpPr>
-          <p:cNvPr id="5" name="Group 4">
-            <a:extLst>
-              <a:ext uri="{FF2B5EF4-FFF2-40B4-BE49-F238E27FC236}">
-                <a16:creationId xmlns:a16="http://schemas.microsoft.com/office/drawing/2014/main" id="{098981F0-F6DA-4E51-B996-2344D48DF594}"/>
-              </a:ext>
-            </a:extLst>
-          </p:cNvPr>
+          <p:cNvPr id="5" name="Group 4"/>
           <p:cNvGrpSpPr/>
           <p:nvPr/>
         </p:nvGrpSpPr>
@@ -4260,9 +3829,7 @@
         <p:cxnSp>
           <p:nvCxnSpPr>
             <p:cNvPr id="33" name="Straight Connector 32"/>
-            <p:cNvCxnSpPr>
-              <a:cxnSpLocks/>
-            </p:cNvCxnSpPr>
+            <p:cNvCxnSpPr/>
             <p:nvPr/>
           </p:nvCxnSpPr>
           <p:spPr bwMode="auto">
@@ -4331,7 +3898,6 @@
                 <a:buSzTx/>
                 <a:buFontTx/>
                 <a:buNone/>
-                <a:tabLst/>
                 <a:defRPr/>
               </a:pPr>
               <a:r>
@@ -4345,9 +3911,9 @@
                   <a:effectLst/>
                   <a:uLnTx/>
                   <a:uFillTx/>
-                  <a:latin typeface="Calibri" pitchFamily="34" charset="0"/>
+                  <a:latin typeface="Calibri" panose="020F0502020204030204" pitchFamily="34" charset="0"/>
                   <a:ea typeface="+mn-ea"/>
-                  <a:cs typeface="Calibri" pitchFamily="34" charset="0"/>
+                  <a:cs typeface="Calibri" panose="020F0502020204030204" pitchFamily="34" charset="0"/>
                 </a:rPr>
                 <a:t>PROFILE</a:t>
               </a:r>
@@ -4361,9 +3927,9 @@
                 <a:effectLst/>
                 <a:uLnTx/>
                 <a:uFillTx/>
-                <a:latin typeface="Calibri" pitchFamily="34" charset="0"/>
+                <a:latin typeface="Calibri" panose="020F0502020204030204" pitchFamily="34" charset="0"/>
                 <a:ea typeface="+mn-ea"/>
-                <a:cs typeface="Calibri" pitchFamily="34" charset="0"/>
+                <a:cs typeface="Calibri" panose="020F0502020204030204" pitchFamily="34" charset="0"/>
               </a:endParaRPr>
             </a:p>
           </p:txBody>
@@ -4385,7 +3951,7 @@
               <a:avLst/>
             </a:prstGeom>
             <a:blipFill dpi="0" rotWithShape="0">
-              <a:blip r:embed="rId5"/>
+              <a:blip r:embed="rId3"/>
               <a:srcRect/>
               <a:stretch>
                 <a:fillRect/>
@@ -4394,16 +3960,10 @@
             <a:ln w="9525">
               <a:noFill/>
               <a:round/>
-              <a:headEnd/>
-              <a:tailEnd/>
             </a:ln>
           </p:spPr>
           <p:txBody>
-            <a:bodyPr vert="horz" wrap="square" lIns="91440" tIns="45720" rIns="91440" bIns="45720" numCol="1" anchor="t" anchorCtr="0" compatLnSpc="1">
-              <a:prstTxWarp prst="textNoShape">
-                <a:avLst/>
-              </a:prstTxWarp>
-            </a:bodyPr>
+            <a:bodyPr vert="horz" wrap="square" lIns="91440" tIns="45720" rIns="91440" bIns="45720" numCol="1" anchor="t" anchorCtr="0" compatLnSpc="1"/>
             <a:lstStyle/>
             <a:p>
               <a:pPr marL="0" marR="0" lvl="0" indent="0" algn="l" defTabSz="914400" rtl="0" eaLnBrk="1" fontAlgn="base" latinLnBrk="0" hangingPunct="1">
@@ -4420,7 +3980,6 @@
                 <a:buSzTx/>
                 <a:buFontTx/>
                 <a:buNone/>
-                <a:tabLst/>
                 <a:defRPr/>
               </a:pPr>
               <a:endParaRPr kumimoji="0" lang="en-US" sz="3600" b="0" i="0" u="none" strike="noStrike" kern="1200" cap="none" spc="0" normalizeH="0" baseline="0" noProof="0" dirty="0">
@@ -4451,8 +4010,8 @@
         </p:nvSpPr>
         <p:spPr bwMode="auto">
           <a:xfrm>
-            <a:off x="4173364" y="497974"/>
-            <a:ext cx="7822418" cy="2123658"/>
+            <a:off x="4173364" y="498401"/>
+            <a:ext cx="7822418" cy="2122805"/>
           </a:xfrm>
           <a:prstGeom prst="rect">
             <a:avLst/>
@@ -4461,16 +4020,11 @@
           <a:ln w="9525">
             <a:noFill/>
             <a:miter lim="800000"/>
-            <a:headEnd/>
-            <a:tailEnd/>
           </a:ln>
           <a:effectLst/>
         </p:spPr>
         <p:txBody>
           <a:bodyPr vert="horz" wrap="square" lIns="91440" tIns="45720" rIns="91440" bIns="45720" numCol="1" anchor="ctr" anchorCtr="0" compatLnSpc="1">
-            <a:prstTxWarp prst="textNoShape">
-              <a:avLst/>
-            </a:prstTxWarp>
             <a:spAutoFit/>
           </a:bodyPr>
           <a:lstStyle/>
@@ -4485,7 +4039,23 @@
                 <a:ea typeface="Times New Roman" panose="02020603050405020304" pitchFamily="18" charset="0"/>
                 <a:cs typeface="Calibri" panose="020F0502020204030204" pitchFamily="34" charset="0"/>
               </a:rPr>
-              <a:t>Over 13+ years of experience </a:t>
+              <a:t>Over 1</a:t>
+            </a:r>
+            <a:r>
+              <a:rPr lang="en-IN" altLang="en-US" sz="1200" b="1" dirty="0">
+                <a:latin typeface="Calibri" panose="020F0502020204030204" pitchFamily="34" charset="0"/>
+                <a:ea typeface="Times New Roman" panose="02020603050405020304" pitchFamily="18" charset="0"/>
+                <a:cs typeface="Calibri" panose="020F0502020204030204" pitchFamily="34" charset="0"/>
+              </a:rPr>
+              <a:t>4</a:t>
+            </a:r>
+            <a:r>
+              <a:rPr lang="en-US" sz="1200" b="1" dirty="0">
+                <a:latin typeface="Calibri" panose="020F0502020204030204" pitchFamily="34" charset="0"/>
+                <a:ea typeface="Times New Roman" panose="02020603050405020304" pitchFamily="18" charset="0"/>
+                <a:cs typeface="Calibri" panose="020F0502020204030204" pitchFamily="34" charset="0"/>
+              </a:rPr>
+              <a:t>+ years of experience </a:t>
             </a:r>
             <a:r>
               <a:rPr lang="en-US" sz="1200" dirty="0">
@@ -4511,6 +4081,11 @@
               </a:rPr>
               <a:t>.</a:t>
             </a:r>
+            <a:endParaRPr lang="en-US" sz="1200" dirty="0">
+              <a:latin typeface="Calibri" panose="020F0502020204030204" pitchFamily="34" charset="0"/>
+              <a:ea typeface="Times New Roman" panose="02020603050405020304" pitchFamily="18" charset="0"/>
+              <a:cs typeface="Calibri" panose="020F0502020204030204" pitchFamily="34" charset="0"/>
+            </a:endParaRPr>
           </a:p>
           <a:p>
             <a:pPr marL="171450" indent="-171450">
@@ -4541,6 +4116,11 @@
               </a:rPr>
               <a:t>.</a:t>
             </a:r>
+            <a:endParaRPr lang="en-US" sz="1200" dirty="0">
+              <a:latin typeface="Calibri" panose="020F0502020204030204" pitchFamily="34" charset="0"/>
+              <a:ea typeface="Times New Roman" panose="02020603050405020304" pitchFamily="18" charset="0"/>
+              <a:cs typeface="Calibri" panose="020F0502020204030204" pitchFamily="34" charset="0"/>
+            </a:endParaRPr>
           </a:p>
           <a:p>
             <a:pPr marL="171450" lvl="0" indent="-171450">
@@ -4568,7 +4148,7 @@
                 <a:latin typeface="Calibri" panose="020F0502020204030204" pitchFamily="34" charset="0"/>
                 <a:ea typeface="Times New Roman" panose="02020603050405020304" pitchFamily="18" charset="0"/>
                 <a:cs typeface="Calibri" panose="020F0502020204030204" pitchFamily="34" charset="0"/>
-                <a:hlinkClick r:id="rId6"/>
+                <a:hlinkClick r:id="rId4"/>
               </a:rPr>
               <a:t>link</a:t>
             </a:r>
@@ -4596,6 +4176,11 @@
               </a:rPr>
               <a:t> employees only)</a:t>
             </a:r>
+            <a:endParaRPr lang="en-US" sz="1200" dirty="0">
+              <a:latin typeface="Calibri" panose="020F0502020204030204" pitchFamily="34" charset="0"/>
+              <a:ea typeface="Times New Roman" panose="02020603050405020304" pitchFamily="18" charset="0"/>
+              <a:cs typeface="Calibri" panose="020F0502020204030204" pitchFamily="34" charset="0"/>
+            </a:endParaRPr>
           </a:p>
           <a:p>
             <a:pPr marL="171450" lvl="0" indent="-171450">
@@ -4618,6 +4203,11 @@
               </a:rPr>
               <a:t> to increase productivity of product for end user and development team</a:t>
             </a:r>
+            <a:endParaRPr lang="en-US" sz="1200" dirty="0">
+              <a:latin typeface="Calibri" panose="020F0502020204030204" pitchFamily="34" charset="0"/>
+              <a:ea typeface="Times New Roman" panose="02020603050405020304" pitchFamily="18" charset="0"/>
+              <a:cs typeface="Calibri" panose="020F0502020204030204" pitchFamily="34" charset="0"/>
+            </a:endParaRPr>
           </a:p>
           <a:p>
             <a:pPr marL="171450" lvl="0" indent="-171450">
@@ -4778,7 +4368,7 @@
         <p:spPr>
           <a:xfrm>
             <a:off x="4211646" y="4811418"/>
-            <a:ext cx="7822418" cy="1754326"/>
+            <a:ext cx="7822418" cy="1753235"/>
           </a:xfrm>
           <a:prstGeom prst="rect">
             <a:avLst/>
@@ -4817,6 +4407,14 @@
               </a:rPr>
               <a:t>, ASET Delhi, 2010</a:t>
             </a:r>
+            <a:endParaRPr lang="en-US" sz="1200" dirty="0">
+              <a:solidFill>
+                <a:srgbClr val="000000"/>
+              </a:solidFill>
+              <a:latin typeface="Calibri" panose="020F0502020204030204" pitchFamily="34" charset="0"/>
+              <a:ea typeface="Calibri" panose="020F0502020204030204" pitchFamily="34" charset="0"/>
+              <a:cs typeface="Calibri" panose="020F0502020204030204" pitchFamily="34" charset="0"/>
+            </a:endParaRPr>
           </a:p>
           <a:p>
             <a:pPr marL="171450" indent="-171450">
@@ -4846,6 +4444,14 @@
               </a:rPr>
               <a:t>, ASET Delhi, 2010</a:t>
             </a:r>
+            <a:endParaRPr lang="en-US" sz="1200" dirty="0">
+              <a:solidFill>
+                <a:srgbClr val="000000"/>
+              </a:solidFill>
+              <a:latin typeface="Calibri" panose="020F0502020204030204" pitchFamily="34" charset="0"/>
+              <a:ea typeface="Calibri" panose="020F0502020204030204" pitchFamily="34" charset="0"/>
+              <a:cs typeface="Calibri" panose="020F0502020204030204" pitchFamily="34" charset="0"/>
+            </a:endParaRPr>
           </a:p>
           <a:p>
             <a:pPr marL="171450" indent="-171450">
@@ -4870,30 +4476,6 @@
                 <a:cs typeface="Calibri" panose="020F0502020204030204" pitchFamily="34" charset="0"/>
               </a:rPr>
               <a:t>, Delhi Rajghat, Indira Gandhi National Open University (I.G.N.O.U) 2015</a:t>
-            </a:r>
-          </a:p>
-          <a:p>
-            <a:pPr marL="171450" indent="-171450">
-              <a:buFont typeface="Arial" panose="020B0604020202020204" pitchFamily="34" charset="0"/>
-              <a:buChar char="•"/>
-              <a:defRPr/>
-            </a:pPr>
-            <a:r>
-              <a:rPr lang="en-US" sz="1200" dirty="0">
-                <a:effectLst/>
-                <a:latin typeface="Calibri" panose="020F0502020204030204" pitchFamily="34" charset="0"/>
-                <a:ea typeface="Calibri" panose="020F0502020204030204" pitchFamily="34" charset="0"/>
-                <a:cs typeface="Calibri" panose="020F0502020204030204" pitchFamily="34" charset="0"/>
-              </a:rPr>
-              <a:t>Certifications: Core PMI 2017, Agile Foundation 2017, Telecom Basics 2020, CMMI 2.0 2020, HIPPA Security 2020, Performance</a:t>
-            </a:r>
-            <a:r>
-              <a:rPr lang="en-US" sz="1200" dirty="0">
-                <a:latin typeface="Calibri" panose="020F0502020204030204" pitchFamily="34" charset="0"/>
-                <a:ea typeface="Calibri" panose="020F0502020204030204" pitchFamily="34" charset="0"/>
-                <a:cs typeface="Calibri" panose="020F0502020204030204" pitchFamily="34" charset="0"/>
-              </a:rPr>
-              <a:t> management 2022, Business Aligned Framework (BAF) Overview 2023, Six Sigma and Lean 2023</a:t>
             </a:r>
             <a:endParaRPr lang="en-US" sz="1200" dirty="0">
               <a:effectLst/>
@@ -4910,37 +4492,27 @@
             </a:pPr>
             <a:r>
               <a:rPr lang="en-US" sz="1200" dirty="0">
-                <a:solidFill>
-                  <a:srgbClr val="000000"/>
-                </a:solidFill>
+                <a:effectLst/>
                 <a:latin typeface="Calibri" panose="020F0502020204030204" pitchFamily="34" charset="0"/>
                 <a:ea typeface="Calibri" panose="020F0502020204030204" pitchFamily="34" charset="0"/>
                 <a:cs typeface="Calibri" panose="020F0502020204030204" pitchFamily="34" charset="0"/>
               </a:rPr>
-              <a:t>Strong experience in End to End Application with </a:t>
-            </a:r>
-            <a:r>
-              <a:rPr lang="en-US" sz="1200" b="1" dirty="0">
-                <a:solidFill>
-                  <a:srgbClr val="000000"/>
-                </a:solidFill>
+              <a:t>Certifications: Core PMI 2017, Agile Foundation 2017, Telecom Basics 2020, CMMI 2.0 2020, HIPPA Security 2020, Performance</a:t>
+            </a:r>
+            <a:r>
+              <a:rPr lang="en-US" sz="1200" dirty="0">
                 <a:latin typeface="Calibri" panose="020F0502020204030204" pitchFamily="34" charset="0"/>
                 <a:ea typeface="Calibri" panose="020F0502020204030204" pitchFamily="34" charset="0"/>
                 <a:cs typeface="Calibri" panose="020F0502020204030204" pitchFamily="34" charset="0"/>
               </a:rPr>
-              <a:t>Cloud and Mobile application performance </a:t>
-            </a:r>
-            <a:r>
-              <a:rPr lang="en-US" sz="1200" dirty="0">
-                <a:solidFill>
-                  <a:srgbClr val="000000"/>
-                </a:solidFill>
-                <a:latin typeface="Calibri" panose="020F0502020204030204" pitchFamily="34" charset="0"/>
-                <a:ea typeface="Calibri" panose="020F0502020204030204" pitchFamily="34" charset="0"/>
-                <a:cs typeface="Calibri" panose="020F0502020204030204" pitchFamily="34" charset="0"/>
-              </a:rPr>
-              <a:t>skills</a:t>
-            </a:r>
+              <a:t> management 2022, Business Aligned Framework (BAF) Overview 2023, Six Sigma and Lean 2023</a:t>
+            </a:r>
+            <a:endParaRPr lang="en-US" sz="1200" dirty="0">
+              <a:effectLst/>
+              <a:latin typeface="Calibri" panose="020F0502020204030204" pitchFamily="34" charset="0"/>
+              <a:ea typeface="Calibri" panose="020F0502020204030204" pitchFamily="34" charset="0"/>
+              <a:cs typeface="Calibri" panose="020F0502020204030204" pitchFamily="34" charset="0"/>
+            </a:endParaRPr>
           </a:p>
           <a:p>
             <a:pPr marL="171450" indent="-171450">
@@ -4957,8 +4529,86 @@
                 <a:ea typeface="Calibri" panose="020F0502020204030204" pitchFamily="34" charset="0"/>
                 <a:cs typeface="Calibri" panose="020F0502020204030204" pitchFamily="34" charset="0"/>
               </a:rPr>
-              <a:t>Exposure to Python, Node.js and PHP as backend languages on AWS cloud infrastructure.</a:t>
-            </a:r>
+              <a:t>Strong experience in End to End Application with </a:t>
+            </a:r>
+            <a:r>
+              <a:rPr lang="en-US" sz="1200" b="1" dirty="0">
+                <a:solidFill>
+                  <a:srgbClr val="000000"/>
+                </a:solidFill>
+                <a:latin typeface="Calibri" panose="020F0502020204030204" pitchFamily="34" charset="0"/>
+                <a:ea typeface="Calibri" panose="020F0502020204030204" pitchFamily="34" charset="0"/>
+                <a:cs typeface="Calibri" panose="020F0502020204030204" pitchFamily="34" charset="0"/>
+              </a:rPr>
+              <a:t>Cloud and Mobile application performance </a:t>
+            </a:r>
+            <a:r>
+              <a:rPr lang="en-US" sz="1200" dirty="0">
+                <a:solidFill>
+                  <a:srgbClr val="000000"/>
+                </a:solidFill>
+                <a:latin typeface="Calibri" panose="020F0502020204030204" pitchFamily="34" charset="0"/>
+                <a:ea typeface="Calibri" panose="020F0502020204030204" pitchFamily="34" charset="0"/>
+                <a:cs typeface="Calibri" panose="020F0502020204030204" pitchFamily="34" charset="0"/>
+              </a:rPr>
+              <a:t>skills</a:t>
+            </a:r>
+            <a:endParaRPr lang="en-US" sz="1200" dirty="0">
+              <a:solidFill>
+                <a:srgbClr val="000000"/>
+              </a:solidFill>
+              <a:latin typeface="Calibri" panose="020F0502020204030204" pitchFamily="34" charset="0"/>
+              <a:ea typeface="Calibri" panose="020F0502020204030204" pitchFamily="34" charset="0"/>
+              <a:cs typeface="Calibri" panose="020F0502020204030204" pitchFamily="34" charset="0"/>
+            </a:endParaRPr>
+          </a:p>
+          <a:p>
+            <a:pPr marL="171450" indent="-171450">
+              <a:buFont typeface="Arial" panose="020B0604020202020204" pitchFamily="34" charset="0"/>
+              <a:buChar char="•"/>
+              <a:defRPr/>
+            </a:pPr>
+            <a:r>
+              <a:rPr lang="en-US" sz="1200" dirty="0">
+                <a:solidFill>
+                  <a:srgbClr val="000000"/>
+                </a:solidFill>
+                <a:latin typeface="Calibri" panose="020F0502020204030204" pitchFamily="34" charset="0"/>
+                <a:ea typeface="Calibri" panose="020F0502020204030204" pitchFamily="34" charset="0"/>
+                <a:cs typeface="Calibri" panose="020F0502020204030204" pitchFamily="34" charset="0"/>
+              </a:rPr>
+              <a:t>Exposure to Python, Node.js and PHP as backend languages on AWS cloud</a:t>
+            </a:r>
+            <a:r>
+              <a:rPr lang="en-IN" altLang="en-US" sz="1200" dirty="0">
+                <a:solidFill>
+                  <a:srgbClr val="000000"/>
+                </a:solidFill>
+                <a:latin typeface="Calibri" panose="020F0502020204030204" pitchFamily="34" charset="0"/>
+                <a:ea typeface="Calibri" panose="020F0502020204030204" pitchFamily="34" charset="0"/>
+                <a:cs typeface="Calibri" panose="020F0502020204030204" pitchFamily="34" charset="0"/>
+              </a:rPr>
+              <a:t>, shared and VPS hosting</a:t>
+            </a:r>
+            <a:r>
+              <a:rPr lang="en-US" sz="1200" dirty="0">
+                <a:solidFill>
+                  <a:srgbClr val="000000"/>
+                </a:solidFill>
+                <a:latin typeface="Calibri" panose="020F0502020204030204" pitchFamily="34" charset="0"/>
+                <a:ea typeface="Calibri" panose="020F0502020204030204" pitchFamily="34" charset="0"/>
+                <a:cs typeface="Calibri" panose="020F0502020204030204" pitchFamily="34" charset="0"/>
+              </a:rPr>
+              <a:t> infrastructure.</a:t>
+            </a:r>
+            <a:endParaRPr lang="en-US" sz="1200" dirty="0">
+              <a:solidFill>
+                <a:srgbClr val="000000"/>
+              </a:solidFill>
+              <a:latin typeface="Calibri" panose="020F0502020204030204" pitchFamily="34" charset="0"/>
+              <a:ea typeface="Calibri" panose="020F0502020204030204" pitchFamily="34" charset="0"/>
+              <a:cs typeface="Calibri" panose="020F0502020204030204" pitchFamily="34" charset="0"/>
+            </a:endParaRPr>
           </a:p>
           <a:p>
             <a:pPr marL="171450" indent="-171450">
@@ -4991,8 +4641,35 @@
                 <a:latin typeface="Calibri" panose="020F0502020204030204" pitchFamily="34" charset="0"/>
                 <a:cs typeface="Calibri" panose="020F0502020204030204" pitchFamily="34" charset="0"/>
               </a:rPr>
-              <a:t> Tele Communication, Ecommerce, Travel and Engineering Technology. </a:t>
-            </a:r>
+              <a:t> </a:t>
+            </a:r>
+            <a:r>
+              <a:rPr lang="en-IN" altLang="en-US" sz="1200" dirty="0">
+                <a:solidFill>
+                  <a:srgbClr val="000000"/>
+                </a:solidFill>
+                <a:latin typeface="Calibri" panose="020F0502020204030204" pitchFamily="34" charset="0"/>
+                <a:cs typeface="Calibri" panose="020F0502020204030204" pitchFamily="34" charset="0"/>
+              </a:rPr>
+              <a:t>Engineering Technologies, </a:t>
+            </a:r>
+            <a:r>
+              <a:rPr lang="en-US" sz="1200" dirty="0">
+                <a:solidFill>
+                  <a:srgbClr val="000000"/>
+                </a:solidFill>
+                <a:latin typeface="Calibri" panose="020F0502020204030204" pitchFamily="34" charset="0"/>
+                <a:cs typeface="Calibri" panose="020F0502020204030204" pitchFamily="34" charset="0"/>
+              </a:rPr>
+              <a:t>Tele Communication, Ecommerce, Travel</a:t>
+            </a:r>
+            <a:endParaRPr lang="en-US" sz="1200" dirty="0">
+              <a:solidFill>
+                <a:srgbClr val="000000"/>
+              </a:solidFill>
+              <a:latin typeface="Calibri" panose="020F0502020204030204" pitchFamily="34" charset="0"/>
+              <a:cs typeface="Calibri" panose="020F0502020204030204" pitchFamily="34" charset="0"/>
+            </a:endParaRPr>
           </a:p>
           <a:p>
             <a:pPr marL="171450" indent="-171450">
@@ -5009,8 +4686,16 @@
                 <a:ea typeface="Calibri" panose="020F0502020204030204" pitchFamily="34" charset="0"/>
                 <a:cs typeface="Calibri" panose="020F0502020204030204" pitchFamily="34" charset="0"/>
               </a:rPr>
-              <a:t>Team technical support and customer support experience for applications across the globe.</a:t>
-            </a:r>
+              <a:t>Team technical support and customer support experience for applications across the globe</a:t>
+            </a:r>
+            <a:endParaRPr lang="en-US" sz="1200" dirty="0">
+              <a:solidFill>
+                <a:srgbClr val="000000"/>
+              </a:solidFill>
+              <a:latin typeface="Calibri" panose="020F0502020204030204" pitchFamily="34" charset="0"/>
+              <a:ea typeface="Calibri" panose="020F0502020204030204" pitchFamily="34" charset="0"/>
+              <a:cs typeface="Calibri" panose="020F0502020204030204" pitchFamily="34" charset="0"/>
+            </a:endParaRPr>
           </a:p>
         </p:txBody>
       </p:sp>
@@ -5023,7 +4708,7 @@
         <p:spPr>
           <a:xfrm>
             <a:off x="4175879" y="2642770"/>
-            <a:ext cx="7822418" cy="2123658"/>
+            <a:ext cx="7822418" cy="2122805"/>
           </a:xfrm>
           <a:prstGeom prst="rect">
             <a:avLst/>
@@ -5072,6 +4757,12 @@
               </a:rPr>
               <a:t> development, 2024 [HCL]</a:t>
             </a:r>
+            <a:endParaRPr lang="en-US" sz="1200" dirty="0">
+              <a:effectLst/>
+              <a:latin typeface="Calibri" panose="020F0502020204030204" pitchFamily="34" charset="0"/>
+              <a:ea typeface="Times New Roman" panose="02020603050405020304" pitchFamily="18" charset="0"/>
+              <a:cs typeface="Calibri" panose="020F0502020204030204" pitchFamily="34" charset="0"/>
+            </a:endParaRPr>
           </a:p>
           <a:p>
             <a:pPr marL="171450" marR="0" indent="-171450" algn="just">
@@ -5097,7 +4788,7 @@
                 <a:ea typeface="Times New Roman" panose="02020603050405020304" pitchFamily="18" charset="0"/>
                 <a:cs typeface="Calibri" panose="020F0502020204030204" pitchFamily="34" charset="0"/>
               </a:rPr>
-              <a:t>Pandas and NumPy</a:t>
+              <a:t>Pandas</a:t>
             </a:r>
             <a:r>
               <a:rPr lang="en-US" sz="1200" dirty="0">
@@ -5126,6 +4817,12 @@
               </a:rPr>
               <a:t>, 2023-2024 [HCL]</a:t>
             </a:r>
+            <a:endParaRPr lang="en-US" sz="1200" dirty="0">
+              <a:effectLst/>
+              <a:latin typeface="Calibri" panose="020F0502020204030204" pitchFamily="34" charset="0"/>
+              <a:ea typeface="Times New Roman" panose="02020603050405020304" pitchFamily="18" charset="0"/>
+              <a:cs typeface="Calibri" panose="020F0502020204030204" pitchFamily="34" charset="0"/>
+            </a:endParaRPr>
           </a:p>
           <a:p>
             <a:pPr marL="171450" marR="0" indent="-171450" algn="just">
@@ -5141,7 +4838,39 @@
                 <a:ea typeface="Calibri" panose="020F0502020204030204" pitchFamily="34" charset="0"/>
                 <a:cs typeface="Calibri" panose="020F0502020204030204" pitchFamily="34" charset="0"/>
               </a:rPr>
-              <a:t>Cisco Project Timeline Management, Node.js and React.js, 2022 – 2023 [HCL]</a:t>
+              <a:t>Cisco Project Timeline Management, </a:t>
+            </a:r>
+            <a:r>
+              <a:rPr lang="en-IN" altLang="en-US" sz="1200" dirty="0">
+                <a:latin typeface="Calibri" panose="020F0502020204030204" pitchFamily="34" charset="0"/>
+                <a:ea typeface="Calibri" panose="020F0502020204030204" pitchFamily="34" charset="0"/>
+                <a:cs typeface="Calibri" panose="020F0502020204030204" pitchFamily="34" charset="0"/>
+              </a:rPr>
+              <a:t>Redhat Openshift multi cloud management, </a:t>
+            </a:r>
+            <a:r>
+              <a:rPr lang="en-US" sz="1200" dirty="0">
+                <a:latin typeface="Calibri" panose="020F0502020204030204" pitchFamily="34" charset="0"/>
+                <a:ea typeface="Calibri" panose="020F0502020204030204" pitchFamily="34" charset="0"/>
+                <a:cs typeface="Calibri" panose="020F0502020204030204" pitchFamily="34" charset="0"/>
+              </a:rPr>
+              <a:t>Node.js</a:t>
+            </a:r>
+            <a:r>
+              <a:rPr lang="en-IN" altLang="en-US" sz="1200" dirty="0">
+                <a:latin typeface="Calibri" panose="020F0502020204030204" pitchFamily="34" charset="0"/>
+                <a:ea typeface="Calibri" panose="020F0502020204030204" pitchFamily="34" charset="0"/>
+                <a:cs typeface="Calibri" panose="020F0502020204030204" pitchFamily="34" charset="0"/>
+              </a:rPr>
+              <a:t>,</a:t>
+            </a:r>
+            <a:r>
+              <a:rPr lang="en-US" sz="1200" dirty="0">
+                <a:latin typeface="Calibri" panose="020F0502020204030204" pitchFamily="34" charset="0"/>
+                <a:ea typeface="Calibri" panose="020F0502020204030204" pitchFamily="34" charset="0"/>
+                <a:cs typeface="Calibri" panose="020F0502020204030204" pitchFamily="34" charset="0"/>
+              </a:rPr>
+              <a:t> React.js, 2022 – 2023 [HCL]</a:t>
             </a:r>
             <a:endParaRPr lang="en-US" sz="1200" dirty="0">
               <a:effectLst/>
@@ -5185,6 +4914,12 @@
               </a:rPr>
               <a:t> SDK, Node.js, 2021-2022 [HCL]</a:t>
             </a:r>
+            <a:endParaRPr lang="en-US" sz="1200" dirty="0">
+              <a:effectLst/>
+              <a:latin typeface="Calibri" panose="020F0502020204030204" pitchFamily="34" charset="0"/>
+              <a:ea typeface="Times New Roman" panose="02020603050405020304" pitchFamily="18" charset="0"/>
+              <a:cs typeface="Calibri" panose="020F0502020204030204" pitchFamily="34" charset="0"/>
+            </a:endParaRPr>
           </a:p>
           <a:p>
             <a:pPr marL="171450" marR="0" indent="-171450" algn="just">
@@ -5395,6 +5130,12 @@
               </a:rPr>
               <a:t>]</a:t>
             </a:r>
+            <a:endParaRPr lang="en-US" sz="1200" dirty="0">
+              <a:effectLst/>
+              <a:latin typeface="Calibri" panose="020F0502020204030204" pitchFamily="34" charset="0"/>
+              <a:ea typeface="Times New Roman" panose="02020603050405020304" pitchFamily="18" charset="0"/>
+              <a:cs typeface="Calibri" panose="020F0502020204030204" pitchFamily="34" charset="0"/>
+            </a:endParaRPr>
           </a:p>
           <a:p>
             <a:pPr marL="171450" marR="0" indent="-171450" algn="just">
@@ -5444,6 +5185,11 @@
               </a:rPr>
               <a:t>, 2015-2016, [Refine Interactive]</a:t>
             </a:r>
+            <a:endParaRPr lang="en-US" sz="1200" dirty="0">
+              <a:latin typeface="Calibri" panose="020F0502020204030204" pitchFamily="34" charset="0"/>
+              <a:ea typeface="Calibri" panose="020F0502020204030204" pitchFamily="34" charset="0"/>
+              <a:cs typeface="Calibri" panose="020F0502020204030204" pitchFamily="34" charset="0"/>
+            </a:endParaRPr>
           </a:p>
           <a:p>
             <a:pPr marL="171450" marR="0" indent="-171450" algn="just">
@@ -5552,13 +5298,7 @@
       </p:sp>
       <p:grpSp>
         <p:nvGrpSpPr>
-          <p:cNvPr id="12" name="Group 11">
-            <a:extLst>
-              <a:ext uri="{FF2B5EF4-FFF2-40B4-BE49-F238E27FC236}">
-                <a16:creationId xmlns:a16="http://schemas.microsoft.com/office/drawing/2014/main" id="{61DB351D-986D-49CB-9A14-4705E8E49A05}"/>
-              </a:ext>
-            </a:extLst>
-          </p:cNvPr>
+          <p:cNvPr id="12" name="Group 11"/>
           <p:cNvGrpSpPr/>
           <p:nvPr/>
         </p:nvGrpSpPr>
@@ -5597,11 +5337,7 @@
             <a:effectLst/>
           </p:spPr>
           <p:txBody>
-            <a:bodyPr vert="horz" wrap="none" lIns="91440" tIns="45720" rIns="91440" bIns="45720" numCol="1" rtlCol="0" anchor="t" anchorCtr="0" compatLnSpc="1">
-              <a:prstTxWarp prst="textNoShape">
-                <a:avLst/>
-              </a:prstTxWarp>
-            </a:bodyPr>
+            <a:bodyPr vert="horz" wrap="none" lIns="91440" tIns="45720" rIns="91440" bIns="45720" numCol="1" rtlCol="0" anchor="t" anchorCtr="0" compatLnSpc="1"/>
             <a:lstStyle/>
             <a:p>
               <a:pPr marL="0" marR="0" lvl="0" indent="0" algn="l" defTabSz="914400" rtl="0" eaLnBrk="1" fontAlgn="base" latinLnBrk="0" hangingPunct="1">
@@ -5618,7 +5354,6 @@
                 <a:buSzTx/>
                 <a:buFontTx/>
                 <a:buNone/>
-                <a:tabLst/>
                 <a:defRPr/>
               </a:pPr>
               <a:endParaRPr kumimoji="0" lang="en-US" sz="3600" b="0" i="0" u="none" strike="noStrike" kern="1200" cap="none" spc="0" normalizeH="0" baseline="0" noProof="0" dirty="0">
@@ -5640,13 +5375,7 @@
         </p:sp>
         <p:grpSp>
           <p:nvGrpSpPr>
-            <p:cNvPr id="10" name="Group 9">
-              <a:extLst>
-                <a:ext uri="{FF2B5EF4-FFF2-40B4-BE49-F238E27FC236}">
-                  <a16:creationId xmlns:a16="http://schemas.microsoft.com/office/drawing/2014/main" id="{40E8D621-343E-4064-B836-84FF6410D564}"/>
-                </a:ext>
-              </a:extLst>
-            </p:cNvPr>
+            <p:cNvPr id="10" name="Group 9"/>
             <p:cNvGrpSpPr/>
             <p:nvPr/>
           </p:nvGrpSpPr>
@@ -5693,7 +5422,6 @@
                   <a:buSzTx/>
                   <a:buFontTx/>
                   <a:buNone/>
-                  <a:tabLst/>
                   <a:defRPr/>
                 </a:pPr>
                 <a:r>
@@ -5702,11 +5430,19 @@
                       <a:srgbClr val="FFFFFF"/>
                     </a:solidFill>
                     <a:latin typeface="Calibri" panose="020F0502020204030204" pitchFamily="34" charset="0"/>
-                    <a:ea typeface="Times New Roman" pitchFamily="18" charset="0"/>
-                    <a:cs typeface="Calibri" pitchFamily="34" charset="0"/>
+                    <a:ea typeface="Times New Roman" panose="02020603050405020304" pitchFamily="18" charset="0"/>
+                    <a:cs typeface="Calibri" panose="020F0502020204030204" pitchFamily="34" charset="0"/>
                   </a:rPr>
                   <a:t>Ranjan Sharma </a:t>
                 </a:r>
+                <a:endParaRPr lang="en-US" sz="1600" b="1" dirty="0">
+                  <a:solidFill>
+                    <a:srgbClr val="FFFFFF"/>
+                  </a:solidFill>
+                  <a:latin typeface="Calibri" panose="020F0502020204030204" pitchFamily="34" charset="0"/>
+                  <a:ea typeface="Times New Roman" panose="02020603050405020304" pitchFamily="18" charset="0"/>
+                  <a:cs typeface="Calibri" panose="020F0502020204030204" pitchFamily="34" charset="0"/>
+                </a:endParaRPr>
               </a:p>
             </p:txBody>
           </p:sp>
@@ -5759,13 +5495,7 @@
         </p:grpSp>
         <p:grpSp>
           <p:nvGrpSpPr>
-            <p:cNvPr id="9" name="Group 8">
-              <a:extLst>
-                <a:ext uri="{FF2B5EF4-FFF2-40B4-BE49-F238E27FC236}">
-                  <a16:creationId xmlns:a16="http://schemas.microsoft.com/office/drawing/2014/main" id="{CDA8A636-A3CE-4B0A-A67B-3FA5052B13BA}"/>
-                </a:ext>
-              </a:extLst>
-            </p:cNvPr>
+            <p:cNvPr id="9" name="Group 8"/>
             <p:cNvGrpSpPr/>
             <p:nvPr/>
           </p:nvGrpSpPr>
@@ -5812,7 +5542,6 @@
                   <a:buSzTx/>
                   <a:buFontTx/>
                   <a:buNone/>
-                  <a:tabLst/>
                   <a:defRPr/>
                 </a:pPr>
                 <a:r>
@@ -5827,11 +5556,25 @@
                     <a:uLnTx/>
                     <a:uFillTx/>
                     <a:latin typeface="Calibri" panose="020F0502020204030204" pitchFamily="34" charset="0"/>
-                    <a:ea typeface="Times New Roman" pitchFamily="18" charset="0"/>
-                    <a:cs typeface="Calibri" pitchFamily="34" charset="0"/>
+                    <a:ea typeface="Times New Roman" panose="02020603050405020304" pitchFamily="18" charset="0"/>
+                    <a:cs typeface="Calibri" panose="020F0502020204030204" pitchFamily="34" charset="0"/>
                   </a:rPr>
                   <a:t>Track</a:t>
                 </a:r>
+                <a:endParaRPr kumimoji="0" lang="en-US" sz="1200" b="1" i="0" u="none" strike="noStrike" kern="1200" cap="none" spc="0" normalizeH="0" baseline="0" noProof="0" dirty="0">
+                  <a:ln>
+                    <a:noFill/>
+                  </a:ln>
+                  <a:solidFill>
+                    <a:srgbClr val="FFFFFF"/>
+                  </a:solidFill>
+                  <a:effectLst/>
+                  <a:uLnTx/>
+                  <a:uFillTx/>
+                  <a:latin typeface="Calibri" panose="020F0502020204030204" pitchFamily="34" charset="0"/>
+                  <a:ea typeface="Times New Roman" panose="02020603050405020304" pitchFamily="18" charset="0"/>
+                  <a:cs typeface="Calibri" panose="020F0502020204030204" pitchFamily="34" charset="0"/>
+                </a:endParaRPr>
               </a:p>
               <a:p>
                 <a:pPr marL="0" marR="0" lvl="0" indent="0" algn="ctr" defTabSz="914400" rtl="0" eaLnBrk="1" fontAlgn="base" latinLnBrk="0" hangingPunct="1">
@@ -5848,7 +5591,6 @@
                   <a:buSzTx/>
                   <a:buFontTx/>
                   <a:buNone/>
-                  <a:tabLst/>
                   <a:defRPr/>
                 </a:pPr>
                 <a:endParaRPr kumimoji="0" lang="en-US" sz="1200" b="1" i="0" u="none" strike="noStrike" kern="1200" cap="none" spc="0" normalizeH="0" baseline="0" noProof="0" dirty="0">
@@ -5863,7 +5605,7 @@
                   <a:uFillTx/>
                   <a:latin typeface="Calibri" panose="020F0502020204030204" pitchFamily="34" charset="0"/>
                   <a:ea typeface="+mn-ea"/>
-                  <a:cs typeface="Calibri" pitchFamily="34" charset="0"/>
+                  <a:cs typeface="Calibri" panose="020F0502020204030204" pitchFamily="34" charset="0"/>
                 </a:endParaRPr>
               </a:p>
             </p:txBody>
@@ -5906,13 +5648,7 @@
         </p:grpSp>
         <p:grpSp>
           <p:nvGrpSpPr>
-            <p:cNvPr id="8" name="Group 7">
-              <a:extLst>
-                <a:ext uri="{FF2B5EF4-FFF2-40B4-BE49-F238E27FC236}">
-                  <a16:creationId xmlns:a16="http://schemas.microsoft.com/office/drawing/2014/main" id="{5181EA66-AC51-4A8B-A9D1-A9BF54379126}"/>
-                </a:ext>
-              </a:extLst>
-            </p:cNvPr>
+            <p:cNvPr id="8" name="Group 7"/>
             <p:cNvGrpSpPr/>
             <p:nvPr/>
           </p:nvGrpSpPr>
@@ -5994,7 +5730,6 @@
                   <a:buSzTx/>
                   <a:buFontTx/>
                   <a:buNone/>
-                  <a:tabLst/>
                   <a:defRPr/>
                 </a:pPr>
                 <a:r>
@@ -6009,11 +5744,25 @@
                     <a:uLnTx/>
                     <a:uFillTx/>
                     <a:latin typeface="Calibri" panose="020F0502020204030204" pitchFamily="34" charset="0"/>
-                    <a:ea typeface="Times New Roman" pitchFamily="18" charset="0"/>
-                    <a:cs typeface="Calibri" pitchFamily="34" charset="0"/>
+                    <a:ea typeface="Times New Roman" panose="02020603050405020304" pitchFamily="18" charset="0"/>
+                    <a:cs typeface="Calibri" panose="020F0502020204030204" pitchFamily="34" charset="0"/>
                   </a:rPr>
                   <a:t>Proposed Role</a:t>
                 </a:r>
+                <a:endParaRPr kumimoji="0" lang="en-US" sz="1200" b="1" i="0" u="none" strike="noStrike" kern="1200" cap="none" spc="0" normalizeH="0" baseline="0" noProof="0" dirty="0">
+                  <a:ln>
+                    <a:noFill/>
+                  </a:ln>
+                  <a:solidFill>
+                    <a:srgbClr val="FFFFFF"/>
+                  </a:solidFill>
+                  <a:effectLst/>
+                  <a:uLnTx/>
+                  <a:uFillTx/>
+                  <a:latin typeface="Calibri" panose="020F0502020204030204" pitchFamily="34" charset="0"/>
+                  <a:ea typeface="Times New Roman" panose="02020603050405020304" pitchFamily="18" charset="0"/>
+                  <a:cs typeface="Calibri" panose="020F0502020204030204" pitchFamily="34" charset="0"/>
+                </a:endParaRPr>
               </a:p>
               <a:p>
                 <a:pPr marL="0" marR="0" lvl="0" indent="0" algn="ctr" defTabSz="914400" rtl="0" eaLnBrk="1" fontAlgn="base" latinLnBrk="0" hangingPunct="1">
@@ -6030,7 +5779,6 @@
                   <a:buSzTx/>
                   <a:buFontTx/>
                   <a:buNone/>
-                  <a:tabLst/>
                   <a:defRPr/>
                 </a:pPr>
                 <a:r>
@@ -6039,7 +5787,7 @@
                       <a:srgbClr val="FFD44B"/>
                     </a:solidFill>
                     <a:latin typeface="Calibri" panose="020F0502020204030204" pitchFamily="34" charset="0"/>
-                    <a:cs typeface="Calibri" pitchFamily="34" charset="0"/>
+                    <a:cs typeface="Calibri" panose="020F0502020204030204" pitchFamily="34" charset="0"/>
                   </a:rPr>
                   <a:t>Technical Specialist</a:t>
                 </a:r>
@@ -6055,7 +5803,7 @@
                   <a:uFillTx/>
                   <a:latin typeface="Calibri" panose="020F0502020204030204" pitchFamily="34" charset="0"/>
                   <a:ea typeface="+mn-ea"/>
-                  <a:cs typeface="Calibri" pitchFamily="34" charset="0"/>
+                  <a:cs typeface="Calibri" panose="020F0502020204030204" pitchFamily="34" charset="0"/>
                 </a:endParaRPr>
               </a:p>
             </p:txBody>
@@ -6063,13 +5811,7 @@
         </p:grpSp>
         <p:grpSp>
           <p:nvGrpSpPr>
-            <p:cNvPr id="31" name="Group 30">
-              <a:extLst>
-                <a:ext uri="{FF2B5EF4-FFF2-40B4-BE49-F238E27FC236}">
-                  <a16:creationId xmlns:a16="http://schemas.microsoft.com/office/drawing/2014/main" id="{E1EE8C7A-1DBB-4B79-97BA-17C6C7FDD275}"/>
-                </a:ext>
-              </a:extLst>
-            </p:cNvPr>
+            <p:cNvPr id="31" name="Group 30"/>
             <p:cNvGrpSpPr/>
             <p:nvPr/>
           </p:nvGrpSpPr>
@@ -6083,13 +5825,7 @@
           </p:grpSpPr>
           <p:sp>
             <p:nvSpPr>
-              <p:cNvPr id="32" name="Rectangle 31">
-                <a:extLst>
-                  <a:ext uri="{FF2B5EF4-FFF2-40B4-BE49-F238E27FC236}">
-                    <a16:creationId xmlns:a16="http://schemas.microsoft.com/office/drawing/2014/main" id="{5B175903-A4DB-41B6-B348-3E99184ACBDC}"/>
-                  </a:ext>
-                </a:extLst>
-              </p:cNvPr>
+              <p:cNvPr id="32" name="Rectangle 31"/>
               <p:cNvSpPr/>
               <p:nvPr/>
             </p:nvSpPr>
@@ -6122,7 +5858,6 @@
                   <a:buSzTx/>
                   <a:buFontTx/>
                   <a:buNone/>
-                  <a:tabLst/>
                   <a:defRPr/>
                 </a:pPr>
                 <a:r>
@@ -6137,11 +5872,25 @@
                     <a:uLnTx/>
                     <a:uFillTx/>
                     <a:latin typeface="Calibri" panose="020F0502020204030204" pitchFamily="34" charset="0"/>
-                    <a:ea typeface="Times New Roman" pitchFamily="18" charset="0"/>
-                    <a:cs typeface="Calibri" pitchFamily="34" charset="0"/>
+                    <a:ea typeface="Times New Roman" panose="02020603050405020304" pitchFamily="18" charset="0"/>
+                    <a:cs typeface="Calibri" panose="020F0502020204030204" pitchFamily="34" charset="0"/>
                   </a:rPr>
                   <a:t>Domain</a:t>
                 </a:r>
+                <a:endParaRPr kumimoji="0" lang="en-US" sz="1200" b="1" i="0" u="none" strike="noStrike" kern="1200" cap="none" spc="0" normalizeH="0" baseline="0" noProof="0" dirty="0">
+                  <a:ln>
+                    <a:noFill/>
+                  </a:ln>
+                  <a:solidFill>
+                    <a:srgbClr val="FFFFFF"/>
+                  </a:solidFill>
+                  <a:effectLst/>
+                  <a:uLnTx/>
+                  <a:uFillTx/>
+                  <a:latin typeface="Calibri" panose="020F0502020204030204" pitchFamily="34" charset="0"/>
+                  <a:ea typeface="Times New Roman" panose="02020603050405020304" pitchFamily="18" charset="0"/>
+                  <a:cs typeface="Calibri" panose="020F0502020204030204" pitchFamily="34" charset="0"/>
+                </a:endParaRPr>
               </a:p>
               <a:p>
                 <a:pPr marL="0" marR="0" lvl="0" indent="0" algn="ctr" defTabSz="914400" rtl="0" eaLnBrk="1" fontAlgn="base" latinLnBrk="0" hangingPunct="1">
@@ -6158,7 +5907,6 @@
                   <a:buSzTx/>
                   <a:buFontTx/>
                   <a:buNone/>
-                  <a:tabLst/>
                   <a:defRPr/>
                 </a:pPr>
                 <a:r>
@@ -6167,7 +5915,7 @@
                       <a:srgbClr val="FFD44B"/>
                     </a:solidFill>
                     <a:latin typeface="Calibri" panose="020F0502020204030204" pitchFamily="34" charset="0"/>
-                    <a:cs typeface="Calibri" pitchFamily="34" charset="0"/>
+                    <a:cs typeface="Calibri" panose="020F0502020204030204" pitchFamily="34" charset="0"/>
                   </a:rPr>
                   <a:t>Software Engineering Technology</a:t>
                 </a:r>
@@ -6183,20 +5931,14 @@
                   <a:uFillTx/>
                   <a:latin typeface="Calibri" panose="020F0502020204030204" pitchFamily="34" charset="0"/>
                   <a:ea typeface="+mn-ea"/>
-                  <a:cs typeface="Calibri" pitchFamily="34" charset="0"/>
+                  <a:cs typeface="Calibri" panose="020F0502020204030204" pitchFamily="34" charset="0"/>
                 </a:endParaRPr>
               </a:p>
             </p:txBody>
           </p:sp>
           <p:cxnSp>
             <p:nvCxnSpPr>
-              <p:cNvPr id="35" name="Straight Connector 34">
-                <a:extLst>
-                  <a:ext uri="{FF2B5EF4-FFF2-40B4-BE49-F238E27FC236}">
-                    <a16:creationId xmlns:a16="http://schemas.microsoft.com/office/drawing/2014/main" id="{57D505CF-82B2-4711-BC79-12628DCAC56C}"/>
-                  </a:ext>
-                </a:extLst>
-              </p:cNvPr>
+              <p:cNvPr id="35" name="Straight Connector 34"/>
               <p:cNvCxnSpPr/>
               <p:nvPr/>
             </p:nvCxnSpPr>
@@ -6232,13 +5974,7 @@
         </p:grpSp>
         <p:grpSp>
           <p:nvGrpSpPr>
-            <p:cNvPr id="36" name="Group 35">
-              <a:extLst>
-                <a:ext uri="{FF2B5EF4-FFF2-40B4-BE49-F238E27FC236}">
-                  <a16:creationId xmlns:a16="http://schemas.microsoft.com/office/drawing/2014/main" id="{BE8071A2-D64F-4212-BF5F-EBA4F0B03984}"/>
-                </a:ext>
-              </a:extLst>
-            </p:cNvPr>
+            <p:cNvPr id="36" name="Group 35"/>
             <p:cNvGrpSpPr/>
             <p:nvPr/>
           </p:nvGrpSpPr>
@@ -6252,13 +5988,7 @@
           </p:grpSpPr>
           <p:sp>
             <p:nvSpPr>
-              <p:cNvPr id="37" name="Rectangle 36">
-                <a:extLst>
-                  <a:ext uri="{FF2B5EF4-FFF2-40B4-BE49-F238E27FC236}">
-                    <a16:creationId xmlns:a16="http://schemas.microsoft.com/office/drawing/2014/main" id="{E6FC2F31-6E27-4371-AA15-98552F45067E}"/>
-                  </a:ext>
-                </a:extLst>
-              </p:cNvPr>
+              <p:cNvPr id="37" name="Rectangle 36"/>
               <p:cNvSpPr/>
               <p:nvPr/>
             </p:nvSpPr>
@@ -6291,7 +6021,6 @@
                   <a:buSzTx/>
                   <a:buFontTx/>
                   <a:buNone/>
-                  <a:tabLst/>
                   <a:defRPr/>
                 </a:pPr>
                 <a:endParaRPr kumimoji="0" lang="en-US" sz="1200" b="1" i="0" u="none" strike="noStrike" kern="1200" cap="none" spc="0" normalizeH="0" baseline="0" noProof="0" dirty="0">
@@ -6305,21 +6034,15 @@
                   <a:uLnTx/>
                   <a:uFillTx/>
                   <a:latin typeface="Calibri" panose="020F0502020204030204" pitchFamily="34" charset="0"/>
-                  <a:ea typeface="Times New Roman" pitchFamily="18" charset="0"/>
-                  <a:cs typeface="Calibri" pitchFamily="34" charset="0"/>
+                  <a:ea typeface="Times New Roman" panose="02020603050405020304" pitchFamily="18" charset="0"/>
+                  <a:cs typeface="Calibri" panose="020F0502020204030204" pitchFamily="34" charset="0"/>
                 </a:endParaRPr>
               </a:p>
             </p:txBody>
           </p:sp>
           <p:cxnSp>
             <p:nvCxnSpPr>
-              <p:cNvPr id="38" name="Straight Connector 37">
-                <a:extLst>
-                  <a:ext uri="{FF2B5EF4-FFF2-40B4-BE49-F238E27FC236}">
-                    <a16:creationId xmlns:a16="http://schemas.microsoft.com/office/drawing/2014/main" id="{DC54B0F1-4ECC-4261-AB06-D6A318F3B5A4}"/>
-                  </a:ext>
-                </a:extLst>
-              </p:cNvPr>
+              <p:cNvPr id="38" name="Straight Connector 37"/>
               <p:cNvCxnSpPr/>
               <p:nvPr/>
             </p:nvCxnSpPr>
@@ -6356,13 +6079,7 @@
       </p:grpSp>
       <p:sp>
         <p:nvSpPr>
-          <p:cNvPr id="50" name="TextBox 49">
-            <a:extLst>
-              <a:ext uri="{FF2B5EF4-FFF2-40B4-BE49-F238E27FC236}">
-                <a16:creationId xmlns:a16="http://schemas.microsoft.com/office/drawing/2014/main" id="{F306EDD5-65A9-48F2-B341-5BB8282101AF}"/>
-              </a:ext>
-            </a:extLst>
-          </p:cNvPr>
+          <p:cNvPr id="50" name="TextBox 49"/>
           <p:cNvSpPr txBox="1"/>
           <p:nvPr/>
         </p:nvSpPr>
@@ -6396,7 +6113,6 @@
               <a:buSzTx/>
               <a:buFontTx/>
               <a:buNone/>
-              <a:tabLst/>
               <a:defRPr/>
             </a:pPr>
             <a:r>
@@ -6411,11 +6127,25 @@
                 <a:uLnTx/>
                 <a:uFillTx/>
                 <a:latin typeface="Calibri" panose="020F0502020204030204" pitchFamily="34" charset="0"/>
-                <a:ea typeface="Times New Roman" pitchFamily="18" charset="0"/>
-                <a:cs typeface="Calibri" pitchFamily="34" charset="0"/>
+                <a:ea typeface="Times New Roman" panose="02020603050405020304" pitchFamily="18" charset="0"/>
+                <a:cs typeface="Calibri" panose="020F0502020204030204" pitchFamily="34" charset="0"/>
               </a:rPr>
               <a:t>Location</a:t>
             </a:r>
+            <a:endParaRPr kumimoji="0" lang="en-US" sz="1600" b="1" i="0" u="none" strike="noStrike" kern="1200" cap="none" spc="0" normalizeH="0" baseline="0" noProof="0" dirty="0">
+              <a:ln>
+                <a:noFill/>
+              </a:ln>
+              <a:solidFill>
+                <a:srgbClr val="FFFFFF"/>
+              </a:solidFill>
+              <a:effectLst/>
+              <a:uLnTx/>
+              <a:uFillTx/>
+              <a:latin typeface="Calibri" panose="020F0502020204030204" pitchFamily="34" charset="0"/>
+              <a:ea typeface="Times New Roman" panose="02020603050405020304" pitchFamily="18" charset="0"/>
+              <a:cs typeface="Calibri" panose="020F0502020204030204" pitchFamily="34" charset="0"/>
+            </a:endParaRPr>
           </a:p>
           <a:p>
             <a:pPr marL="0" marR="0" lvl="0" indent="0" algn="ctr" defTabSz="914400" rtl="0" eaLnBrk="1" fontAlgn="base" latinLnBrk="0" hangingPunct="1">
@@ -6432,7 +6162,6 @@
               <a:buSzTx/>
               <a:buFontTx/>
               <a:buNone/>
-              <a:tabLst/>
               <a:defRPr/>
             </a:pPr>
             <a:r>
@@ -6441,7 +6170,7 @@
                   <a:srgbClr val="FFD44B"/>
                 </a:solidFill>
                 <a:latin typeface="Calibri" panose="020F0502020204030204" pitchFamily="34" charset="0"/>
-                <a:cs typeface="Calibri" pitchFamily="34" charset="0"/>
+                <a:cs typeface="Calibri" panose="020F0502020204030204" pitchFamily="34" charset="0"/>
               </a:rPr>
               <a:t>Noida,</a:t>
             </a:r>
@@ -6458,25 +6187,31 @@
                 <a:uFillTx/>
                 <a:latin typeface="Calibri" panose="020F0502020204030204" pitchFamily="34" charset="0"/>
                 <a:ea typeface="+mn-ea"/>
-                <a:cs typeface="Calibri" pitchFamily="34" charset="0"/>
+                <a:cs typeface="Calibri" panose="020F0502020204030204" pitchFamily="34" charset="0"/>
               </a:rPr>
               <a:t> India</a:t>
             </a:r>
+            <a:endParaRPr kumimoji="0" lang="en-US" sz="1600" b="1" i="0" u="none" strike="noStrike" kern="1200" cap="none" spc="0" normalizeH="0" baseline="0" noProof="0" dirty="0">
+              <a:ln>
+                <a:noFill/>
+              </a:ln>
+              <a:solidFill>
+                <a:srgbClr val="FFD44B"/>
+              </a:solidFill>
+              <a:effectLst/>
+              <a:uLnTx/>
+              <a:uFillTx/>
+              <a:latin typeface="Calibri" panose="020F0502020204030204" pitchFamily="34" charset="0"/>
+              <a:ea typeface="+mn-ea"/>
+              <a:cs typeface="Calibri" panose="020F0502020204030204" pitchFamily="34" charset="0"/>
+            </a:endParaRPr>
           </a:p>
         </p:txBody>
       </p:sp>
       <p:cxnSp>
         <p:nvCxnSpPr>
-          <p:cNvPr id="20" name="Straight Connector 19">
-            <a:extLst>
-              <a:ext uri="{FF2B5EF4-FFF2-40B4-BE49-F238E27FC236}">
-                <a16:creationId xmlns:a16="http://schemas.microsoft.com/office/drawing/2014/main" id="{C25B1386-BD6A-43CE-9217-14DE68FEA14B}"/>
-              </a:ext>
-            </a:extLst>
-          </p:cNvPr>
-          <p:cNvCxnSpPr>
-            <a:cxnSpLocks/>
-          </p:cNvCxnSpPr>
+          <p:cNvPr id="20" name="Straight Connector 19"/>
+          <p:cNvCxnSpPr/>
           <p:nvPr/>
         </p:nvCxnSpPr>
         <p:spPr>
@@ -6505,24 +6240,18 @@
       </p:cxnSp>
       <p:pic>
         <p:nvPicPr>
-          <p:cNvPr id="7" name="Picture 6" descr="A person in a suit&#10;&#10;Description automatically generated">
-            <a:extLst>
-              <a:ext uri="{FF2B5EF4-FFF2-40B4-BE49-F238E27FC236}">
-                <a16:creationId xmlns:a16="http://schemas.microsoft.com/office/drawing/2014/main" id="{F5231195-E698-5B99-C0A7-A4B1C7151A7E}"/>
-              </a:ext>
-            </a:extLst>
-          </p:cNvPr>
+          <p:cNvPr id="7" name="Picture 6" descr="A person in a suit&#10;&#10;Description automatically generated"/>
           <p:cNvPicPr>
             <a:picLocks noChangeAspect="1"/>
           </p:cNvPicPr>
           <p:nvPr/>
         </p:nvPicPr>
         <p:blipFill>
-          <a:blip r:embed="rId7">
+          <a:blip r:embed="rId5">
             <a:extLst>
               <a:ext uri="{BEBA8EAE-BF5A-486C-A8C5-ECC9F3942E4B}">
                 <a14:imgProps xmlns:a14="http://schemas.microsoft.com/office/drawing/2010/main">
-                  <a14:imgLayer r:embed="rId8">
+                  <a14:imgLayer r:embed="rId6">
                     <a14:imgEffect>
                       <a14:backgroundRemoval t="8871" b="99194" l="5618" r="96629">
                         <a14:foregroundMark x1="5618" y1="95968" x2="5618" y2="95968"/>
@@ -6576,11 +6305,6 @@
         </p:spPr>
       </p:pic>
     </p:spTree>
-    <p:extLst>
-      <p:ext uri="{BB962C8B-B14F-4D97-AF65-F5344CB8AC3E}">
-        <p14:creationId xmlns:p14="http://schemas.microsoft.com/office/powerpoint/2010/main" val="2314470529"/>
-      </p:ext>
-    </p:extLst>
   </p:cSld>
   <p:clrMapOvr>
     <a:masterClrMapping/>
@@ -6631,7 +6355,7 @@
     </a:clrScheme>
     <a:fontScheme name="Office">
       <a:majorFont>
-        <a:latin typeface="Calibri Light" panose="020F0302020204030204"/>
+        <a:latin typeface="Calibri Light"/>
         <a:ea typeface=""/>
         <a:cs typeface=""/>
         <a:font script="Jpan" typeface="游ゴシック Light"/>
@@ -6664,26 +6388,9 @@
         <a:font script="Viet" typeface="Times New Roman"/>
         <a:font script="Uigh" typeface="Microsoft Uighur"/>
         <a:font script="Geor" typeface="Sylfaen"/>
-        <a:font script="Armn" typeface="Arial"/>
-        <a:font script="Bugi" typeface="Leelawadee UI"/>
-        <a:font script="Bopo" typeface="Microsoft JhengHei"/>
-        <a:font script="Java" typeface="Javanese Text"/>
-        <a:font script="Lisu" typeface="Segoe UI"/>
-        <a:font script="Mymr" typeface="Myanmar Text"/>
-        <a:font script="Nkoo" typeface="Ebrima"/>
-        <a:font script="Olck" typeface="Nirmala UI"/>
-        <a:font script="Osma" typeface="Ebrima"/>
-        <a:font script="Phag" typeface="Phagspa"/>
-        <a:font script="Syrn" typeface="Estrangelo Edessa"/>
-        <a:font script="Syrj" typeface="Estrangelo Edessa"/>
-        <a:font script="Syre" typeface="Estrangelo Edessa"/>
-        <a:font script="Sora" typeface="Nirmala UI"/>
-        <a:font script="Tale" typeface="Microsoft Tai Le"/>
-        <a:font script="Talu" typeface="Microsoft New Tai Lue"/>
-        <a:font script="Tfng" typeface="Ebrima"/>
       </a:majorFont>
       <a:minorFont>
-        <a:latin typeface="Calibri" panose="020F0502020204030204"/>
+        <a:latin typeface="Calibri"/>
         <a:ea typeface=""/>
         <a:cs typeface=""/>
         <a:font script="Jpan" typeface="游ゴシック"/>
@@ -6716,23 +6423,6 @@
         <a:font script="Viet" typeface="Arial"/>
         <a:font script="Uigh" typeface="Microsoft Uighur"/>
         <a:font script="Geor" typeface="Sylfaen"/>
-        <a:font script="Armn" typeface="Arial"/>
-        <a:font script="Bugi" typeface="Leelawadee UI"/>
-        <a:font script="Bopo" typeface="Microsoft JhengHei"/>
-        <a:font script="Java" typeface="Javanese Text"/>
-        <a:font script="Lisu" typeface="Segoe UI"/>
-        <a:font script="Mymr" typeface="Myanmar Text"/>
-        <a:font script="Nkoo" typeface="Ebrima"/>
-        <a:font script="Olck" typeface="Nirmala UI"/>
-        <a:font script="Osma" typeface="Ebrima"/>
-        <a:font script="Phag" typeface="Phagspa"/>
-        <a:font script="Syrn" typeface="Estrangelo Edessa"/>
-        <a:font script="Syrj" typeface="Estrangelo Edessa"/>
-        <a:font script="Syre" typeface="Estrangelo Edessa"/>
-        <a:font script="Sora" typeface="Nirmala UI"/>
-        <a:font script="Tale" typeface="Microsoft Tai Le"/>
-        <a:font script="Talu" typeface="Microsoft New Tai Lue"/>
-        <a:font script="Tfng" typeface="Ebrima"/>
       </a:minorFont>
     </a:fontScheme>
     <a:fmtScheme name="Office">
@@ -6873,8 +6563,6 @@
       </a:bgFillStyleLst>
     </a:fmtScheme>
   </a:themeElements>
-  <a:objectDefaults/>
-  <a:extraClrSchemeLst/>
   <a:extLst>
     <a:ext uri="{05A4C25C-085E-4340-85A3-A5531E510DB2}">
       <thm15:themeFamily xmlns:thm15="http://schemas.microsoft.com/office/thememl/2012/main" name="Office Theme" id="{62F939B6-93AF-4DB8-9C6B-D6C7DFDC589F}" vid="{4A3C46E8-61CC-4603-A589-7422A47A8E4A}"/>
@@ -6926,7 +6614,7 @@
     </a:clrScheme>
     <a:fontScheme name="Office">
       <a:majorFont>
-        <a:latin typeface="Calibri Light" panose="020F0302020204030204"/>
+        <a:latin typeface="Calibri Light"/>
         <a:ea typeface=""/>
         <a:cs typeface=""/>
         <a:font script="Jpan" typeface="游ゴシック Light"/>
@@ -6959,26 +6647,9 @@
         <a:font script="Viet" typeface="Times New Roman"/>
         <a:font script="Uigh" typeface="Microsoft Uighur"/>
         <a:font script="Geor" typeface="Sylfaen"/>
-        <a:font script="Armn" typeface="Arial"/>
-        <a:font script="Bugi" typeface="Leelawadee UI"/>
-        <a:font script="Bopo" typeface="Microsoft JhengHei"/>
-        <a:font script="Java" typeface="Javanese Text"/>
-        <a:font script="Lisu" typeface="Segoe UI"/>
-        <a:font script="Mymr" typeface="Myanmar Text"/>
-        <a:font script="Nkoo" typeface="Ebrima"/>
-        <a:font script="Olck" typeface="Nirmala UI"/>
-        <a:font script="Osma" typeface="Ebrima"/>
-        <a:font script="Phag" typeface="Phagspa"/>
-        <a:font script="Syrn" typeface="Estrangelo Edessa"/>
-        <a:font script="Syrj" typeface="Estrangelo Edessa"/>
-        <a:font script="Syre" typeface="Estrangelo Edessa"/>
-        <a:font script="Sora" typeface="Nirmala UI"/>
-        <a:font script="Tale" typeface="Microsoft Tai Le"/>
-        <a:font script="Talu" typeface="Microsoft New Tai Lue"/>
-        <a:font script="Tfng" typeface="Ebrima"/>
       </a:majorFont>
       <a:minorFont>
-        <a:latin typeface="Calibri" panose="020F0502020204030204"/>
+        <a:latin typeface="Calibri"/>
         <a:ea typeface=""/>
         <a:cs typeface=""/>
         <a:font script="Jpan" typeface="游ゴシック"/>
@@ -7011,23 +6682,6 @@
         <a:font script="Viet" typeface="Arial"/>
         <a:font script="Uigh" typeface="Microsoft Uighur"/>
         <a:font script="Geor" typeface="Sylfaen"/>
-        <a:font script="Armn" typeface="Arial"/>
-        <a:font script="Bugi" typeface="Leelawadee UI"/>
-        <a:font script="Bopo" typeface="Microsoft JhengHei"/>
-        <a:font script="Java" typeface="Javanese Text"/>
-        <a:font script="Lisu" typeface="Segoe UI"/>
-        <a:font script="Mymr" typeface="Myanmar Text"/>
-        <a:font script="Nkoo" typeface="Ebrima"/>
-        <a:font script="Olck" typeface="Nirmala UI"/>
-        <a:font script="Osma" typeface="Ebrima"/>
-        <a:font script="Phag" typeface="Phagspa"/>
-        <a:font script="Syrn" typeface="Estrangelo Edessa"/>
-        <a:font script="Syrj" typeface="Estrangelo Edessa"/>
-        <a:font script="Syre" typeface="Estrangelo Edessa"/>
-        <a:font script="Sora" typeface="Nirmala UI"/>
-        <a:font script="Tale" typeface="Microsoft Tai Le"/>
-        <a:font script="Talu" typeface="Microsoft New Tai Lue"/>
-        <a:font script="Tfng" typeface="Ebrima"/>
       </a:minorFont>
     </a:fontScheme>
     <a:fmtScheme name="Office">
@@ -7168,8 +6822,6 @@
       </a:bgFillStyleLst>
     </a:fmtScheme>
   </a:themeElements>
-  <a:objectDefaults/>
-  <a:extraClrSchemeLst/>
   <a:extLst>
     <a:ext uri="{05A4C25C-085E-4340-85A3-A5531E510DB2}">
       <thm15:themeFamily xmlns:thm15="http://schemas.microsoft.com/office/thememl/2012/main" name="Office Theme" id="{62F939B6-93AF-4DB8-9C6B-D6C7DFDC589F}" vid="{4A3C46E8-61CC-4603-A589-7422A47A8E4A}"/>
